--- a/Fig/NOR_NOR.pptx
+++ b/Fig/NOR_NOR.pptx
@@ -8,6 +8,8 @@
     <p:sldId id="257" r:id="rId2"/>
     <p:sldId id="258" r:id="rId3"/>
     <p:sldId id="259" r:id="rId4"/>
+    <p:sldId id="260" r:id="rId5"/>
+    <p:sldId id="261" r:id="rId6"/>
   </p:sldIdLst>
   <p:sldSz cx="12192000" cy="6858000"/>
   <p:notesSz cx="6858000" cy="9144000"/>
@@ -263,7 +265,7 @@
           <a:p>
             <a:fld id="{87211922-7D03-45AB-9F72-54BC254BD8A2}" type="datetimeFigureOut">
               <a:rPr lang="nl-NL" smtClean="0"/>
-              <a:t>22-4-2026</a:t>
+              <a:t>28-4-2026</a:t>
             </a:fld>
             <a:endParaRPr lang="nl-NL"/>
           </a:p>
@@ -463,7 +465,7 @@
           <a:p>
             <a:fld id="{87211922-7D03-45AB-9F72-54BC254BD8A2}" type="datetimeFigureOut">
               <a:rPr lang="nl-NL" smtClean="0"/>
-              <a:t>22-4-2026</a:t>
+              <a:t>28-4-2026</a:t>
             </a:fld>
             <a:endParaRPr lang="nl-NL"/>
           </a:p>
@@ -673,7 +675,7 @@
           <a:p>
             <a:fld id="{87211922-7D03-45AB-9F72-54BC254BD8A2}" type="datetimeFigureOut">
               <a:rPr lang="nl-NL" smtClean="0"/>
-              <a:t>22-4-2026</a:t>
+              <a:t>28-4-2026</a:t>
             </a:fld>
             <a:endParaRPr lang="nl-NL"/>
           </a:p>
@@ -873,7 +875,7 @@
           <a:p>
             <a:fld id="{87211922-7D03-45AB-9F72-54BC254BD8A2}" type="datetimeFigureOut">
               <a:rPr lang="nl-NL" smtClean="0"/>
-              <a:t>22-4-2026</a:t>
+              <a:t>28-4-2026</a:t>
             </a:fld>
             <a:endParaRPr lang="nl-NL"/>
           </a:p>
@@ -1149,7 +1151,7 @@
           <a:p>
             <a:fld id="{87211922-7D03-45AB-9F72-54BC254BD8A2}" type="datetimeFigureOut">
               <a:rPr lang="nl-NL" smtClean="0"/>
-              <a:t>22-4-2026</a:t>
+              <a:t>28-4-2026</a:t>
             </a:fld>
             <a:endParaRPr lang="nl-NL"/>
           </a:p>
@@ -1417,7 +1419,7 @@
           <a:p>
             <a:fld id="{87211922-7D03-45AB-9F72-54BC254BD8A2}" type="datetimeFigureOut">
               <a:rPr lang="nl-NL" smtClean="0"/>
-              <a:t>22-4-2026</a:t>
+              <a:t>28-4-2026</a:t>
             </a:fld>
             <a:endParaRPr lang="nl-NL"/>
           </a:p>
@@ -1832,7 +1834,7 @@
           <a:p>
             <a:fld id="{87211922-7D03-45AB-9F72-54BC254BD8A2}" type="datetimeFigureOut">
               <a:rPr lang="nl-NL" smtClean="0"/>
-              <a:t>22-4-2026</a:t>
+              <a:t>28-4-2026</a:t>
             </a:fld>
             <a:endParaRPr lang="nl-NL"/>
           </a:p>
@@ -1974,7 +1976,7 @@
           <a:p>
             <a:fld id="{87211922-7D03-45AB-9F72-54BC254BD8A2}" type="datetimeFigureOut">
               <a:rPr lang="nl-NL" smtClean="0"/>
-              <a:t>22-4-2026</a:t>
+              <a:t>28-4-2026</a:t>
             </a:fld>
             <a:endParaRPr lang="nl-NL"/>
           </a:p>
@@ -2087,7 +2089,7 @@
           <a:p>
             <a:fld id="{87211922-7D03-45AB-9F72-54BC254BD8A2}" type="datetimeFigureOut">
               <a:rPr lang="nl-NL" smtClean="0"/>
-              <a:t>22-4-2026</a:t>
+              <a:t>28-4-2026</a:t>
             </a:fld>
             <a:endParaRPr lang="nl-NL"/>
           </a:p>
@@ -2400,7 +2402,7 @@
           <a:p>
             <a:fld id="{87211922-7D03-45AB-9F72-54BC254BD8A2}" type="datetimeFigureOut">
               <a:rPr lang="nl-NL" smtClean="0"/>
-              <a:t>22-4-2026</a:t>
+              <a:t>28-4-2026</a:t>
             </a:fld>
             <a:endParaRPr lang="nl-NL"/>
           </a:p>
@@ -2689,7 +2691,7 @@
           <a:p>
             <a:fld id="{87211922-7D03-45AB-9F72-54BC254BD8A2}" type="datetimeFigureOut">
               <a:rPr lang="nl-NL" smtClean="0"/>
-              <a:t>22-4-2026</a:t>
+              <a:t>28-4-2026</a:t>
             </a:fld>
             <a:endParaRPr lang="nl-NL"/>
           </a:p>
@@ -2932,7 +2934,7 @@
           <a:p>
             <a:fld id="{87211922-7D03-45AB-9F72-54BC254BD8A2}" type="datetimeFigureOut">
               <a:rPr lang="nl-NL" smtClean="0"/>
-              <a:t>22-4-2026</a:t>
+              <a:t>28-4-2026</a:t>
             </a:fld>
             <a:endParaRPr lang="nl-NL"/>
           </a:p>
@@ -3768,6 +3770,280 @@
     <p:extLst>
       <p:ext uri="{BB962C8B-B14F-4D97-AF65-F5344CB8AC3E}">
         <p14:creationId xmlns:p14="http://schemas.microsoft.com/office/powerpoint/2010/main" val="870808947"/>
+      </p:ext>
+    </p:extLst>
+  </p:cSld>
+  <p:clrMapOvr>
+    <a:masterClrMapping/>
+  </p:clrMapOvr>
+</p:sld>
+</file>
+
+<file path=ppt/slides/slide4.xml><?xml version="1.0" encoding="utf-8"?>
+<p:sld xmlns:a="http://schemas.openxmlformats.org/drawingml/2006/main" xmlns:r="http://schemas.openxmlformats.org/officeDocument/2006/relationships" xmlns:p="http://schemas.openxmlformats.org/presentationml/2006/main">
+  <p:cSld>
+    <p:spTree>
+      <p:nvGrpSpPr>
+        <p:cNvPr id="1" name=""/>
+        <p:cNvGrpSpPr/>
+        <p:nvPr/>
+      </p:nvGrpSpPr>
+      <p:grpSpPr>
+        <a:xfrm>
+          <a:off x="0" y="0"/>
+          <a:ext cx="0" cy="0"/>
+          <a:chOff x="0" y="0"/>
+          <a:chExt cx="0" cy="0"/>
+        </a:xfrm>
+      </p:grpSpPr>
+      <p:pic>
+        <p:nvPicPr>
+          <p:cNvPr id="3" name="Picture 2">
+            <a:extLst>
+              <a:ext uri="{FF2B5EF4-FFF2-40B4-BE49-F238E27FC236}">
+                <a16:creationId xmlns:a16="http://schemas.microsoft.com/office/drawing/2014/main" id="{314D3A4C-3D31-EB92-0059-8DD0E863DFD7}"/>
+              </a:ext>
+            </a:extLst>
+          </p:cNvPr>
+          <p:cNvPicPr>
+            <a:picLocks noChangeAspect="1"/>
+          </p:cNvPicPr>
+          <p:nvPr/>
+        </p:nvPicPr>
+        <p:blipFill>
+          <a:blip r:embed="rId2">
+            <a:extLst>
+              <a:ext uri="{28A0092B-C50C-407E-A947-70E740481C1C}">
+                <a14:useLocalDpi xmlns:a14="http://schemas.microsoft.com/office/drawing/2010/main" val="0"/>
+              </a:ext>
+            </a:extLst>
+          </a:blip>
+          <a:stretch>
+            <a:fillRect/>
+          </a:stretch>
+        </p:blipFill>
+        <p:spPr>
+          <a:xfrm>
+            <a:off x="1022096" y="894303"/>
+            <a:ext cx="10298665" cy="5144755"/>
+          </a:xfrm>
+          <a:prstGeom prst="rect">
+            <a:avLst/>
+          </a:prstGeom>
+        </p:spPr>
+      </p:pic>
+      <p:sp>
+        <p:nvSpPr>
+          <p:cNvPr id="4" name="TextBox 3">
+            <a:extLst>
+              <a:ext uri="{FF2B5EF4-FFF2-40B4-BE49-F238E27FC236}">
+                <a16:creationId xmlns:a16="http://schemas.microsoft.com/office/drawing/2014/main" id="{8E9C8249-BC5B-8206-8FA0-62DB0A0CF9B2}"/>
+              </a:ext>
+            </a:extLst>
+          </p:cNvPr>
+          <p:cNvSpPr txBox="1"/>
+          <p:nvPr/>
+        </p:nvSpPr>
+        <p:spPr>
+          <a:xfrm>
+            <a:off x="1340842" y="309528"/>
+            <a:ext cx="623455" cy="523220"/>
+          </a:xfrm>
+          <a:prstGeom prst="rect">
+            <a:avLst/>
+          </a:prstGeom>
+          <a:noFill/>
+        </p:spPr>
+        <p:txBody>
+          <a:bodyPr wrap="square" rtlCol="0">
+            <a:spAutoFit/>
+          </a:bodyPr>
+          <a:lstStyle/>
+          <a:p>
+            <a:r>
+              <a:rPr lang="nl-NL" sz="2800" b="1" dirty="0"/>
+              <a:t>A.</a:t>
+            </a:r>
+            <a:endParaRPr lang="nl-NL" sz="3600" b="1" dirty="0"/>
+          </a:p>
+        </p:txBody>
+      </p:sp>
+      <p:sp>
+        <p:nvSpPr>
+          <p:cNvPr id="5" name="TextBox 4">
+            <a:extLst>
+              <a:ext uri="{FF2B5EF4-FFF2-40B4-BE49-F238E27FC236}">
+                <a16:creationId xmlns:a16="http://schemas.microsoft.com/office/drawing/2014/main" id="{3800322A-556A-10ED-5B13-6CFBD0B974CD}"/>
+              </a:ext>
+            </a:extLst>
+          </p:cNvPr>
+          <p:cNvSpPr txBox="1"/>
+          <p:nvPr/>
+        </p:nvSpPr>
+        <p:spPr>
+          <a:xfrm>
+            <a:off x="7049978" y="309528"/>
+            <a:ext cx="623455" cy="523220"/>
+          </a:xfrm>
+          <a:prstGeom prst="rect">
+            <a:avLst/>
+          </a:prstGeom>
+          <a:noFill/>
+        </p:spPr>
+        <p:txBody>
+          <a:bodyPr wrap="square" rtlCol="0">
+            <a:spAutoFit/>
+          </a:bodyPr>
+          <a:lstStyle/>
+          <a:p>
+            <a:r>
+              <a:rPr lang="nl-NL" sz="2800" b="1" dirty="0"/>
+              <a:t>B.</a:t>
+            </a:r>
+            <a:endParaRPr lang="nl-NL" sz="3600" b="1" dirty="0"/>
+          </a:p>
+        </p:txBody>
+      </p:sp>
+    </p:spTree>
+    <p:extLst>
+      <p:ext uri="{BB962C8B-B14F-4D97-AF65-F5344CB8AC3E}">
+        <p14:creationId xmlns:p14="http://schemas.microsoft.com/office/powerpoint/2010/main" val="239576753"/>
+      </p:ext>
+    </p:extLst>
+  </p:cSld>
+  <p:clrMapOvr>
+    <a:masterClrMapping/>
+  </p:clrMapOvr>
+</p:sld>
+</file>
+
+<file path=ppt/slides/slide5.xml><?xml version="1.0" encoding="utf-8"?>
+<p:sld xmlns:a="http://schemas.openxmlformats.org/drawingml/2006/main" xmlns:r="http://schemas.openxmlformats.org/officeDocument/2006/relationships" xmlns:p="http://schemas.openxmlformats.org/presentationml/2006/main">
+  <p:cSld>
+    <p:spTree>
+      <p:nvGrpSpPr>
+        <p:cNvPr id="1" name=""/>
+        <p:cNvGrpSpPr/>
+        <p:nvPr/>
+      </p:nvGrpSpPr>
+      <p:grpSpPr>
+        <a:xfrm>
+          <a:off x="0" y="0"/>
+          <a:ext cx="0" cy="0"/>
+          <a:chOff x="0" y="0"/>
+          <a:chExt cx="0" cy="0"/>
+        </a:xfrm>
+      </p:grpSpPr>
+      <p:pic>
+        <p:nvPicPr>
+          <p:cNvPr id="3" name="Picture 2">
+            <a:extLst>
+              <a:ext uri="{FF2B5EF4-FFF2-40B4-BE49-F238E27FC236}">
+                <a16:creationId xmlns:a16="http://schemas.microsoft.com/office/drawing/2014/main" id="{79C47C6C-CD54-2C8D-5F78-212B9658200B}"/>
+              </a:ext>
+            </a:extLst>
+          </p:cNvPr>
+          <p:cNvPicPr>
+            <a:picLocks noChangeAspect="1"/>
+          </p:cNvPicPr>
+          <p:nvPr/>
+        </p:nvPicPr>
+        <p:blipFill>
+          <a:blip r:embed="rId2">
+            <a:extLst>
+              <a:ext uri="{28A0092B-C50C-407E-A947-70E740481C1C}">
+                <a14:useLocalDpi xmlns:a14="http://schemas.microsoft.com/office/drawing/2010/main" val="0"/>
+              </a:ext>
+            </a:extLst>
+          </a:blip>
+          <a:stretch>
+            <a:fillRect/>
+          </a:stretch>
+        </p:blipFill>
+        <p:spPr>
+          <a:xfrm>
+            <a:off x="2525720" y="1462869"/>
+            <a:ext cx="7532680" cy="4148200"/>
+          </a:xfrm>
+          <a:prstGeom prst="rect">
+            <a:avLst/>
+          </a:prstGeom>
+        </p:spPr>
+      </p:pic>
+      <p:sp>
+        <p:nvSpPr>
+          <p:cNvPr id="6" name="TextBox 5">
+            <a:extLst>
+              <a:ext uri="{FF2B5EF4-FFF2-40B4-BE49-F238E27FC236}">
+                <a16:creationId xmlns:a16="http://schemas.microsoft.com/office/drawing/2014/main" id="{F1EA1996-869B-40B7-B8DD-9B474287B32B}"/>
+              </a:ext>
+            </a:extLst>
+          </p:cNvPr>
+          <p:cNvSpPr txBox="1"/>
+          <p:nvPr/>
+        </p:nvSpPr>
+        <p:spPr>
+          <a:xfrm>
+            <a:off x="2786326" y="1110021"/>
+            <a:ext cx="635299" cy="523220"/>
+          </a:xfrm>
+          <a:prstGeom prst="rect">
+            <a:avLst/>
+          </a:prstGeom>
+          <a:noFill/>
+        </p:spPr>
+        <p:txBody>
+          <a:bodyPr wrap="square" rtlCol="0">
+            <a:spAutoFit/>
+          </a:bodyPr>
+          <a:lstStyle/>
+          <a:p>
+            <a:r>
+              <a:rPr lang="nl-NL" sz="2800" b="1" dirty="0"/>
+              <a:t>A.</a:t>
+            </a:r>
+          </a:p>
+        </p:txBody>
+      </p:sp>
+      <p:sp>
+        <p:nvSpPr>
+          <p:cNvPr id="7" name="TextBox 6">
+            <a:extLst>
+              <a:ext uri="{FF2B5EF4-FFF2-40B4-BE49-F238E27FC236}">
+                <a16:creationId xmlns:a16="http://schemas.microsoft.com/office/drawing/2014/main" id="{F3995E65-FF4F-D16C-C11A-549F8CA2FCA6}"/>
+              </a:ext>
+            </a:extLst>
+          </p:cNvPr>
+          <p:cNvSpPr txBox="1"/>
+          <p:nvPr/>
+        </p:nvSpPr>
+        <p:spPr>
+          <a:xfrm>
+            <a:off x="5844160" y="1110021"/>
+            <a:ext cx="623455" cy="523220"/>
+          </a:xfrm>
+          <a:prstGeom prst="rect">
+            <a:avLst/>
+          </a:prstGeom>
+          <a:noFill/>
+        </p:spPr>
+        <p:txBody>
+          <a:bodyPr wrap="square" rtlCol="0">
+            <a:spAutoFit/>
+          </a:bodyPr>
+          <a:lstStyle/>
+          <a:p>
+            <a:r>
+              <a:rPr lang="nl-NL" sz="2800" b="1" dirty="0"/>
+              <a:t>B.</a:t>
+            </a:r>
+          </a:p>
+        </p:txBody>
+      </p:sp>
+    </p:spTree>
+    <p:extLst>
+      <p:ext uri="{BB962C8B-B14F-4D97-AF65-F5344CB8AC3E}">
+        <p14:creationId xmlns:p14="http://schemas.microsoft.com/office/powerpoint/2010/main" val="3015964336"/>
       </p:ext>
     </p:extLst>
   </p:cSld>

--- a/Fig/NOR_NOR.pptx
+++ b/Fig/NOR_NOR.pptx
@@ -10,6 +10,8 @@
     <p:sldId id="259" r:id="rId4"/>
     <p:sldId id="260" r:id="rId5"/>
     <p:sldId id="261" r:id="rId6"/>
+    <p:sldId id="262" r:id="rId7"/>
+    <p:sldId id="263" r:id="rId8"/>
   </p:sldIdLst>
   <p:sldSz cx="12192000" cy="6858000"/>
   <p:notesSz cx="6858000" cy="9144000"/>
@@ -265,7 +267,7 @@
           <a:p>
             <a:fld id="{87211922-7D03-45AB-9F72-54BC254BD8A2}" type="datetimeFigureOut">
               <a:rPr lang="nl-NL" smtClean="0"/>
-              <a:t>28-4-2026</a:t>
+              <a:t>1-5-2026</a:t>
             </a:fld>
             <a:endParaRPr lang="nl-NL"/>
           </a:p>
@@ -465,7 +467,7 @@
           <a:p>
             <a:fld id="{87211922-7D03-45AB-9F72-54BC254BD8A2}" type="datetimeFigureOut">
               <a:rPr lang="nl-NL" smtClean="0"/>
-              <a:t>28-4-2026</a:t>
+              <a:t>1-5-2026</a:t>
             </a:fld>
             <a:endParaRPr lang="nl-NL"/>
           </a:p>
@@ -675,7 +677,7 @@
           <a:p>
             <a:fld id="{87211922-7D03-45AB-9F72-54BC254BD8A2}" type="datetimeFigureOut">
               <a:rPr lang="nl-NL" smtClean="0"/>
-              <a:t>28-4-2026</a:t>
+              <a:t>1-5-2026</a:t>
             </a:fld>
             <a:endParaRPr lang="nl-NL"/>
           </a:p>
@@ -875,7 +877,7 @@
           <a:p>
             <a:fld id="{87211922-7D03-45AB-9F72-54BC254BD8A2}" type="datetimeFigureOut">
               <a:rPr lang="nl-NL" smtClean="0"/>
-              <a:t>28-4-2026</a:t>
+              <a:t>1-5-2026</a:t>
             </a:fld>
             <a:endParaRPr lang="nl-NL"/>
           </a:p>
@@ -1151,7 +1153,7 @@
           <a:p>
             <a:fld id="{87211922-7D03-45AB-9F72-54BC254BD8A2}" type="datetimeFigureOut">
               <a:rPr lang="nl-NL" smtClean="0"/>
-              <a:t>28-4-2026</a:t>
+              <a:t>1-5-2026</a:t>
             </a:fld>
             <a:endParaRPr lang="nl-NL"/>
           </a:p>
@@ -1419,7 +1421,7 @@
           <a:p>
             <a:fld id="{87211922-7D03-45AB-9F72-54BC254BD8A2}" type="datetimeFigureOut">
               <a:rPr lang="nl-NL" smtClean="0"/>
-              <a:t>28-4-2026</a:t>
+              <a:t>1-5-2026</a:t>
             </a:fld>
             <a:endParaRPr lang="nl-NL"/>
           </a:p>
@@ -1834,7 +1836,7 @@
           <a:p>
             <a:fld id="{87211922-7D03-45AB-9F72-54BC254BD8A2}" type="datetimeFigureOut">
               <a:rPr lang="nl-NL" smtClean="0"/>
-              <a:t>28-4-2026</a:t>
+              <a:t>1-5-2026</a:t>
             </a:fld>
             <a:endParaRPr lang="nl-NL"/>
           </a:p>
@@ -1976,7 +1978,7 @@
           <a:p>
             <a:fld id="{87211922-7D03-45AB-9F72-54BC254BD8A2}" type="datetimeFigureOut">
               <a:rPr lang="nl-NL" smtClean="0"/>
-              <a:t>28-4-2026</a:t>
+              <a:t>1-5-2026</a:t>
             </a:fld>
             <a:endParaRPr lang="nl-NL"/>
           </a:p>
@@ -2089,7 +2091,7 @@
           <a:p>
             <a:fld id="{87211922-7D03-45AB-9F72-54BC254BD8A2}" type="datetimeFigureOut">
               <a:rPr lang="nl-NL" smtClean="0"/>
-              <a:t>28-4-2026</a:t>
+              <a:t>1-5-2026</a:t>
             </a:fld>
             <a:endParaRPr lang="nl-NL"/>
           </a:p>
@@ -2402,7 +2404,7 @@
           <a:p>
             <a:fld id="{87211922-7D03-45AB-9F72-54BC254BD8A2}" type="datetimeFigureOut">
               <a:rPr lang="nl-NL" smtClean="0"/>
-              <a:t>28-4-2026</a:t>
+              <a:t>1-5-2026</a:t>
             </a:fld>
             <a:endParaRPr lang="nl-NL"/>
           </a:p>
@@ -2691,7 +2693,7 @@
           <a:p>
             <a:fld id="{87211922-7D03-45AB-9F72-54BC254BD8A2}" type="datetimeFigureOut">
               <a:rPr lang="nl-NL" smtClean="0"/>
-              <a:t>28-4-2026</a:t>
+              <a:t>1-5-2026</a:t>
             </a:fld>
             <a:endParaRPr lang="nl-NL"/>
           </a:p>
@@ -2934,7 +2936,7 @@
           <a:p>
             <a:fld id="{87211922-7D03-45AB-9F72-54BC254BD8A2}" type="datetimeFigureOut">
               <a:rPr lang="nl-NL" smtClean="0"/>
-              <a:t>28-4-2026</a:t>
+              <a:t>1-5-2026</a:t>
             </a:fld>
             <a:endParaRPr lang="nl-NL"/>
           </a:p>
@@ -4044,6 +4046,278 @@
     <p:extLst>
       <p:ext uri="{BB962C8B-B14F-4D97-AF65-F5344CB8AC3E}">
         <p14:creationId xmlns:p14="http://schemas.microsoft.com/office/powerpoint/2010/main" val="3015964336"/>
+      </p:ext>
+    </p:extLst>
+  </p:cSld>
+  <p:clrMapOvr>
+    <a:masterClrMapping/>
+  </p:clrMapOvr>
+</p:sld>
+</file>
+
+<file path=ppt/slides/slide6.xml><?xml version="1.0" encoding="utf-8"?>
+<p:sld xmlns:a="http://schemas.openxmlformats.org/drawingml/2006/main" xmlns:r="http://schemas.openxmlformats.org/officeDocument/2006/relationships" xmlns:p="http://schemas.openxmlformats.org/presentationml/2006/main">
+  <p:cSld>
+    <p:spTree>
+      <p:nvGrpSpPr>
+        <p:cNvPr id="1" name=""/>
+        <p:cNvGrpSpPr/>
+        <p:nvPr/>
+      </p:nvGrpSpPr>
+      <p:grpSpPr>
+        <a:xfrm>
+          <a:off x="0" y="0"/>
+          <a:ext cx="0" cy="0"/>
+          <a:chOff x="0" y="0"/>
+          <a:chExt cx="0" cy="0"/>
+        </a:xfrm>
+      </p:grpSpPr>
+      <p:pic>
+        <p:nvPicPr>
+          <p:cNvPr id="3" name="Picture 2">
+            <a:extLst>
+              <a:ext uri="{FF2B5EF4-FFF2-40B4-BE49-F238E27FC236}">
+                <a16:creationId xmlns:a16="http://schemas.microsoft.com/office/drawing/2014/main" id="{31180763-4446-1E34-088E-91C0898E7C57}"/>
+              </a:ext>
+            </a:extLst>
+          </p:cNvPr>
+          <p:cNvPicPr>
+            <a:picLocks noChangeAspect="1"/>
+          </p:cNvPicPr>
+          <p:nvPr/>
+        </p:nvPicPr>
+        <p:blipFill>
+          <a:blip r:embed="rId2">
+            <a:extLst>
+              <a:ext uri="{28A0092B-C50C-407E-A947-70E740481C1C}">
+                <a14:useLocalDpi xmlns:a14="http://schemas.microsoft.com/office/drawing/2010/main" val="0"/>
+              </a:ext>
+            </a:extLst>
+          </a:blip>
+          <a:stretch>
+            <a:fillRect/>
+          </a:stretch>
+        </p:blipFill>
+        <p:spPr>
+          <a:xfrm>
+            <a:off x="781050" y="1151164"/>
+            <a:ext cx="10629900" cy="4555672"/>
+          </a:xfrm>
+          <a:prstGeom prst="rect">
+            <a:avLst/>
+          </a:prstGeom>
+        </p:spPr>
+      </p:pic>
+      <p:sp>
+        <p:nvSpPr>
+          <p:cNvPr id="4" name="TextBox 3">
+            <a:extLst>
+              <a:ext uri="{FF2B5EF4-FFF2-40B4-BE49-F238E27FC236}">
+                <a16:creationId xmlns:a16="http://schemas.microsoft.com/office/drawing/2014/main" id="{05284242-EE64-3AE5-BE47-AD78FD3DA911}"/>
+              </a:ext>
+            </a:extLst>
+          </p:cNvPr>
+          <p:cNvSpPr txBox="1"/>
+          <p:nvPr/>
+        </p:nvSpPr>
+        <p:spPr>
+          <a:xfrm>
+            <a:off x="897014" y="773844"/>
+            <a:ext cx="635299" cy="523220"/>
+          </a:xfrm>
+          <a:prstGeom prst="rect">
+            <a:avLst/>
+          </a:prstGeom>
+          <a:noFill/>
+        </p:spPr>
+        <p:txBody>
+          <a:bodyPr wrap="square" rtlCol="0">
+            <a:spAutoFit/>
+          </a:bodyPr>
+          <a:lstStyle/>
+          <a:p>
+            <a:r>
+              <a:rPr lang="nl-NL" sz="2800" b="1" dirty="0"/>
+              <a:t>A.</a:t>
+            </a:r>
+          </a:p>
+        </p:txBody>
+      </p:sp>
+      <p:sp>
+        <p:nvSpPr>
+          <p:cNvPr id="5" name="TextBox 4">
+            <a:extLst>
+              <a:ext uri="{FF2B5EF4-FFF2-40B4-BE49-F238E27FC236}">
+                <a16:creationId xmlns:a16="http://schemas.microsoft.com/office/drawing/2014/main" id="{15C4985A-C71A-68BC-1563-F3737E08DA8D}"/>
+              </a:ext>
+            </a:extLst>
+          </p:cNvPr>
+          <p:cNvSpPr txBox="1"/>
+          <p:nvPr/>
+        </p:nvSpPr>
+        <p:spPr>
+          <a:xfrm>
+            <a:off x="5374885" y="773844"/>
+            <a:ext cx="635299" cy="523220"/>
+          </a:xfrm>
+          <a:prstGeom prst="rect">
+            <a:avLst/>
+          </a:prstGeom>
+          <a:noFill/>
+        </p:spPr>
+        <p:txBody>
+          <a:bodyPr wrap="square" rtlCol="0">
+            <a:spAutoFit/>
+          </a:bodyPr>
+          <a:lstStyle/>
+          <a:p>
+            <a:r>
+              <a:rPr lang="nl-NL" sz="2800" b="1" dirty="0"/>
+              <a:t>B.</a:t>
+            </a:r>
+          </a:p>
+        </p:txBody>
+      </p:sp>
+    </p:spTree>
+    <p:extLst>
+      <p:ext uri="{BB962C8B-B14F-4D97-AF65-F5344CB8AC3E}">
+        <p14:creationId xmlns:p14="http://schemas.microsoft.com/office/powerpoint/2010/main" val="1703736076"/>
+      </p:ext>
+    </p:extLst>
+  </p:cSld>
+  <p:clrMapOvr>
+    <a:masterClrMapping/>
+  </p:clrMapOvr>
+</p:sld>
+</file>
+
+<file path=ppt/slides/slide7.xml><?xml version="1.0" encoding="utf-8"?>
+<p:sld xmlns:a="http://schemas.openxmlformats.org/drawingml/2006/main" xmlns:r="http://schemas.openxmlformats.org/officeDocument/2006/relationships" xmlns:p="http://schemas.openxmlformats.org/presentationml/2006/main">
+  <p:cSld>
+    <p:spTree>
+      <p:nvGrpSpPr>
+        <p:cNvPr id="1" name=""/>
+        <p:cNvGrpSpPr/>
+        <p:nvPr/>
+      </p:nvGrpSpPr>
+      <p:grpSpPr>
+        <a:xfrm>
+          <a:off x="0" y="0"/>
+          <a:ext cx="0" cy="0"/>
+          <a:chOff x="0" y="0"/>
+          <a:chExt cx="0" cy="0"/>
+        </a:xfrm>
+      </p:grpSpPr>
+      <p:pic>
+        <p:nvPicPr>
+          <p:cNvPr id="3" name="Picture 2">
+            <a:extLst>
+              <a:ext uri="{FF2B5EF4-FFF2-40B4-BE49-F238E27FC236}">
+                <a16:creationId xmlns:a16="http://schemas.microsoft.com/office/drawing/2014/main" id="{FE6B004D-D557-23B6-5E45-61416802EC4D}"/>
+              </a:ext>
+            </a:extLst>
+          </p:cNvPr>
+          <p:cNvPicPr>
+            <a:picLocks noChangeAspect="1"/>
+          </p:cNvPicPr>
+          <p:nvPr/>
+        </p:nvPicPr>
+        <p:blipFill>
+          <a:blip r:embed="rId2">
+            <a:extLst>
+              <a:ext uri="{28A0092B-C50C-407E-A947-70E740481C1C}">
+                <a14:useLocalDpi xmlns:a14="http://schemas.microsoft.com/office/drawing/2010/main" val="0"/>
+              </a:ext>
+            </a:extLst>
+          </a:blip>
+          <a:stretch>
+            <a:fillRect/>
+          </a:stretch>
+        </p:blipFill>
+        <p:spPr>
+          <a:xfrm>
+            <a:off x="2525720" y="1428576"/>
+            <a:ext cx="7140559" cy="4000847"/>
+          </a:xfrm>
+          <a:prstGeom prst="rect">
+            <a:avLst/>
+          </a:prstGeom>
+        </p:spPr>
+      </p:pic>
+      <p:sp>
+        <p:nvSpPr>
+          <p:cNvPr id="4" name="TextBox 3">
+            <a:extLst>
+              <a:ext uri="{FF2B5EF4-FFF2-40B4-BE49-F238E27FC236}">
+                <a16:creationId xmlns:a16="http://schemas.microsoft.com/office/drawing/2014/main" id="{B6583EB9-0B5D-8739-561A-E0452B03B7CA}"/>
+              </a:ext>
+            </a:extLst>
+          </p:cNvPr>
+          <p:cNvSpPr txBox="1"/>
+          <p:nvPr/>
+        </p:nvSpPr>
+        <p:spPr>
+          <a:xfrm>
+            <a:off x="2786326" y="1110021"/>
+            <a:ext cx="635299" cy="523220"/>
+          </a:xfrm>
+          <a:prstGeom prst="rect">
+            <a:avLst/>
+          </a:prstGeom>
+          <a:noFill/>
+        </p:spPr>
+        <p:txBody>
+          <a:bodyPr wrap="square" rtlCol="0">
+            <a:spAutoFit/>
+          </a:bodyPr>
+          <a:lstStyle/>
+          <a:p>
+            <a:r>
+              <a:rPr lang="nl-NL" sz="2800" b="1" dirty="0"/>
+              <a:t>A.</a:t>
+            </a:r>
+          </a:p>
+        </p:txBody>
+      </p:sp>
+      <p:sp>
+        <p:nvSpPr>
+          <p:cNvPr id="5" name="TextBox 4">
+            <a:extLst>
+              <a:ext uri="{FF2B5EF4-FFF2-40B4-BE49-F238E27FC236}">
+                <a16:creationId xmlns:a16="http://schemas.microsoft.com/office/drawing/2014/main" id="{B89ACE98-C277-BB10-9A45-8552DAF71BCE}"/>
+              </a:ext>
+            </a:extLst>
+          </p:cNvPr>
+          <p:cNvSpPr txBox="1"/>
+          <p:nvPr/>
+        </p:nvSpPr>
+        <p:spPr>
+          <a:xfrm>
+            <a:off x="5668479" y="1110021"/>
+            <a:ext cx="635299" cy="523220"/>
+          </a:xfrm>
+          <a:prstGeom prst="rect">
+            <a:avLst/>
+          </a:prstGeom>
+          <a:noFill/>
+        </p:spPr>
+        <p:txBody>
+          <a:bodyPr wrap="square" rtlCol="0">
+            <a:spAutoFit/>
+          </a:bodyPr>
+          <a:lstStyle/>
+          <a:p>
+            <a:r>
+              <a:rPr lang="nl-NL" sz="2800" b="1" dirty="0"/>
+              <a:t>B.</a:t>
+            </a:r>
+          </a:p>
+        </p:txBody>
+      </p:sp>
+    </p:spTree>
+    <p:extLst>
+      <p:ext uri="{BB962C8B-B14F-4D97-AF65-F5344CB8AC3E}">
+        <p14:creationId xmlns:p14="http://schemas.microsoft.com/office/powerpoint/2010/main" val="3313120462"/>
       </p:ext>
     </p:extLst>
   </p:cSld>

--- a/Fig/NOR_NOR.pptx
+++ b/Fig/NOR_NOR.pptx
@@ -12,6 +12,7 @@
     <p:sldId id="261" r:id="rId6"/>
     <p:sldId id="262" r:id="rId7"/>
     <p:sldId id="263" r:id="rId8"/>
+    <p:sldId id="264" r:id="rId9"/>
   </p:sldIdLst>
   <p:sldSz cx="12192000" cy="6858000"/>
   <p:notesSz cx="6858000" cy="9144000"/>
@@ -267,7 +268,7 @@
           <a:p>
             <a:fld id="{87211922-7D03-45AB-9F72-54BC254BD8A2}" type="datetimeFigureOut">
               <a:rPr lang="nl-NL" smtClean="0"/>
-              <a:t>1-5-2026</a:t>
+              <a:t>2-5-2026</a:t>
             </a:fld>
             <a:endParaRPr lang="nl-NL"/>
           </a:p>
@@ -467,7 +468,7 @@
           <a:p>
             <a:fld id="{87211922-7D03-45AB-9F72-54BC254BD8A2}" type="datetimeFigureOut">
               <a:rPr lang="nl-NL" smtClean="0"/>
-              <a:t>1-5-2026</a:t>
+              <a:t>2-5-2026</a:t>
             </a:fld>
             <a:endParaRPr lang="nl-NL"/>
           </a:p>
@@ -677,7 +678,7 @@
           <a:p>
             <a:fld id="{87211922-7D03-45AB-9F72-54BC254BD8A2}" type="datetimeFigureOut">
               <a:rPr lang="nl-NL" smtClean="0"/>
-              <a:t>1-5-2026</a:t>
+              <a:t>2-5-2026</a:t>
             </a:fld>
             <a:endParaRPr lang="nl-NL"/>
           </a:p>
@@ -877,7 +878,7 @@
           <a:p>
             <a:fld id="{87211922-7D03-45AB-9F72-54BC254BD8A2}" type="datetimeFigureOut">
               <a:rPr lang="nl-NL" smtClean="0"/>
-              <a:t>1-5-2026</a:t>
+              <a:t>2-5-2026</a:t>
             </a:fld>
             <a:endParaRPr lang="nl-NL"/>
           </a:p>
@@ -1153,7 +1154,7 @@
           <a:p>
             <a:fld id="{87211922-7D03-45AB-9F72-54BC254BD8A2}" type="datetimeFigureOut">
               <a:rPr lang="nl-NL" smtClean="0"/>
-              <a:t>1-5-2026</a:t>
+              <a:t>2-5-2026</a:t>
             </a:fld>
             <a:endParaRPr lang="nl-NL"/>
           </a:p>
@@ -1421,7 +1422,7 @@
           <a:p>
             <a:fld id="{87211922-7D03-45AB-9F72-54BC254BD8A2}" type="datetimeFigureOut">
               <a:rPr lang="nl-NL" smtClean="0"/>
-              <a:t>1-5-2026</a:t>
+              <a:t>2-5-2026</a:t>
             </a:fld>
             <a:endParaRPr lang="nl-NL"/>
           </a:p>
@@ -1836,7 +1837,7 @@
           <a:p>
             <a:fld id="{87211922-7D03-45AB-9F72-54BC254BD8A2}" type="datetimeFigureOut">
               <a:rPr lang="nl-NL" smtClean="0"/>
-              <a:t>1-5-2026</a:t>
+              <a:t>2-5-2026</a:t>
             </a:fld>
             <a:endParaRPr lang="nl-NL"/>
           </a:p>
@@ -1978,7 +1979,7 @@
           <a:p>
             <a:fld id="{87211922-7D03-45AB-9F72-54BC254BD8A2}" type="datetimeFigureOut">
               <a:rPr lang="nl-NL" smtClean="0"/>
-              <a:t>1-5-2026</a:t>
+              <a:t>2-5-2026</a:t>
             </a:fld>
             <a:endParaRPr lang="nl-NL"/>
           </a:p>
@@ -2091,7 +2092,7 @@
           <a:p>
             <a:fld id="{87211922-7D03-45AB-9F72-54BC254BD8A2}" type="datetimeFigureOut">
               <a:rPr lang="nl-NL" smtClean="0"/>
-              <a:t>1-5-2026</a:t>
+              <a:t>2-5-2026</a:t>
             </a:fld>
             <a:endParaRPr lang="nl-NL"/>
           </a:p>
@@ -2404,7 +2405,7 @@
           <a:p>
             <a:fld id="{87211922-7D03-45AB-9F72-54BC254BD8A2}" type="datetimeFigureOut">
               <a:rPr lang="nl-NL" smtClean="0"/>
-              <a:t>1-5-2026</a:t>
+              <a:t>2-5-2026</a:t>
             </a:fld>
             <a:endParaRPr lang="nl-NL"/>
           </a:p>
@@ -2693,7 +2694,7 @@
           <a:p>
             <a:fld id="{87211922-7D03-45AB-9F72-54BC254BD8A2}" type="datetimeFigureOut">
               <a:rPr lang="nl-NL" smtClean="0"/>
-              <a:t>1-5-2026</a:t>
+              <a:t>2-5-2026</a:t>
             </a:fld>
             <a:endParaRPr lang="nl-NL"/>
           </a:p>
@@ -2936,7 +2937,7 @@
           <a:p>
             <a:fld id="{87211922-7D03-45AB-9F72-54BC254BD8A2}" type="datetimeFigureOut">
               <a:rPr lang="nl-NL" smtClean="0"/>
-              <a:t>1-5-2026</a:t>
+              <a:t>2-5-2026</a:t>
             </a:fld>
             <a:endParaRPr lang="nl-NL"/>
           </a:p>
@@ -4318,6 +4319,142 @@
     <p:extLst>
       <p:ext uri="{BB962C8B-B14F-4D97-AF65-F5344CB8AC3E}">
         <p14:creationId xmlns:p14="http://schemas.microsoft.com/office/powerpoint/2010/main" val="3313120462"/>
+      </p:ext>
+    </p:extLst>
+  </p:cSld>
+  <p:clrMapOvr>
+    <a:masterClrMapping/>
+  </p:clrMapOvr>
+</p:sld>
+</file>
+
+<file path=ppt/slides/slide8.xml><?xml version="1.0" encoding="utf-8"?>
+<p:sld xmlns:a="http://schemas.openxmlformats.org/drawingml/2006/main" xmlns:r="http://schemas.openxmlformats.org/officeDocument/2006/relationships" xmlns:p="http://schemas.openxmlformats.org/presentationml/2006/main">
+  <p:cSld>
+    <p:spTree>
+      <p:nvGrpSpPr>
+        <p:cNvPr id="1" name=""/>
+        <p:cNvGrpSpPr/>
+        <p:nvPr/>
+      </p:nvGrpSpPr>
+      <p:grpSpPr>
+        <a:xfrm>
+          <a:off x="0" y="0"/>
+          <a:ext cx="0" cy="0"/>
+          <a:chOff x="0" y="0"/>
+          <a:chExt cx="0" cy="0"/>
+        </a:xfrm>
+      </p:grpSpPr>
+      <p:pic>
+        <p:nvPicPr>
+          <p:cNvPr id="3" name="Picture 2">
+            <a:extLst>
+              <a:ext uri="{FF2B5EF4-FFF2-40B4-BE49-F238E27FC236}">
+                <a16:creationId xmlns:a16="http://schemas.microsoft.com/office/drawing/2014/main" id="{50A739B5-7684-D847-660A-CBDA9C93B613}"/>
+              </a:ext>
+            </a:extLst>
+          </p:cNvPr>
+          <p:cNvPicPr>
+            <a:picLocks noChangeAspect="1"/>
+          </p:cNvPicPr>
+          <p:nvPr/>
+        </p:nvPicPr>
+        <p:blipFill>
+          <a:blip r:embed="rId2">
+            <a:extLst>
+              <a:ext uri="{28A0092B-C50C-407E-A947-70E740481C1C}">
+                <a14:useLocalDpi xmlns:a14="http://schemas.microsoft.com/office/drawing/2010/main" val="0"/>
+              </a:ext>
+            </a:extLst>
+          </a:blip>
+          <a:stretch>
+            <a:fillRect/>
+          </a:stretch>
+        </p:blipFill>
+        <p:spPr>
+          <a:xfrm>
+            <a:off x="804582" y="986807"/>
+            <a:ext cx="10582835" cy="4884385"/>
+          </a:xfrm>
+          <a:prstGeom prst="rect">
+            <a:avLst/>
+          </a:prstGeom>
+        </p:spPr>
+      </p:pic>
+      <p:sp>
+        <p:nvSpPr>
+          <p:cNvPr id="4" name="TextBox 3">
+            <a:extLst>
+              <a:ext uri="{FF2B5EF4-FFF2-40B4-BE49-F238E27FC236}">
+                <a16:creationId xmlns:a16="http://schemas.microsoft.com/office/drawing/2014/main" id="{86F488B7-6059-96C7-E286-62B4F2687766}"/>
+              </a:ext>
+            </a:extLst>
+          </p:cNvPr>
+          <p:cNvSpPr txBox="1"/>
+          <p:nvPr/>
+        </p:nvSpPr>
+        <p:spPr>
+          <a:xfrm>
+            <a:off x="930632" y="612480"/>
+            <a:ext cx="635299" cy="523220"/>
+          </a:xfrm>
+          <a:prstGeom prst="rect">
+            <a:avLst/>
+          </a:prstGeom>
+          <a:noFill/>
+        </p:spPr>
+        <p:txBody>
+          <a:bodyPr wrap="square" rtlCol="0">
+            <a:spAutoFit/>
+          </a:bodyPr>
+          <a:lstStyle/>
+          <a:p>
+            <a:r>
+              <a:rPr lang="nl-NL" sz="2800" b="1" dirty="0"/>
+              <a:t>A.</a:t>
+            </a:r>
+          </a:p>
+        </p:txBody>
+      </p:sp>
+      <p:sp>
+        <p:nvSpPr>
+          <p:cNvPr id="5" name="TextBox 4">
+            <a:extLst>
+              <a:ext uri="{FF2B5EF4-FFF2-40B4-BE49-F238E27FC236}">
+                <a16:creationId xmlns:a16="http://schemas.microsoft.com/office/drawing/2014/main" id="{AF29E055-D837-59B0-8848-1EE3E1EBBF24}"/>
+              </a:ext>
+            </a:extLst>
+          </p:cNvPr>
+          <p:cNvSpPr txBox="1"/>
+          <p:nvPr/>
+        </p:nvSpPr>
+        <p:spPr>
+          <a:xfrm>
+            <a:off x="5187618" y="612480"/>
+            <a:ext cx="635299" cy="523220"/>
+          </a:xfrm>
+          <a:prstGeom prst="rect">
+            <a:avLst/>
+          </a:prstGeom>
+          <a:noFill/>
+        </p:spPr>
+        <p:txBody>
+          <a:bodyPr wrap="square" rtlCol="0">
+            <a:spAutoFit/>
+          </a:bodyPr>
+          <a:lstStyle/>
+          <a:p>
+            <a:r>
+              <a:rPr lang="nl-NL" sz="2800" b="1" dirty="0"/>
+              <a:t>B.</a:t>
+            </a:r>
+          </a:p>
+        </p:txBody>
+      </p:sp>
+    </p:spTree>
+    <p:extLst>
+      <p:ext uri="{BB962C8B-B14F-4D97-AF65-F5344CB8AC3E}">
+        <p14:creationId xmlns:p14="http://schemas.microsoft.com/office/powerpoint/2010/main" val="30110922"/>
       </p:ext>
     </p:extLst>
   </p:cSld>

--- a/Fig/NOR_NOR.pptx
+++ b/Fig/NOR_NOR.pptx
@@ -6,13 +6,17 @@
   </p:sldMasterIdLst>
   <p:sldIdLst>
     <p:sldId id="257" r:id="rId2"/>
-    <p:sldId id="258" r:id="rId3"/>
-    <p:sldId id="259" r:id="rId4"/>
-    <p:sldId id="260" r:id="rId5"/>
-    <p:sldId id="261" r:id="rId6"/>
-    <p:sldId id="262" r:id="rId7"/>
-    <p:sldId id="263" r:id="rId8"/>
-    <p:sldId id="264" r:id="rId9"/>
+    <p:sldId id="266" r:id="rId3"/>
+    <p:sldId id="258" r:id="rId4"/>
+    <p:sldId id="259" r:id="rId5"/>
+    <p:sldId id="260" r:id="rId6"/>
+    <p:sldId id="261" r:id="rId7"/>
+    <p:sldId id="262" r:id="rId8"/>
+    <p:sldId id="263" r:id="rId9"/>
+    <p:sldId id="264" r:id="rId10"/>
+    <p:sldId id="265" r:id="rId11"/>
+    <p:sldId id="267" r:id="rId12"/>
+    <p:sldId id="268" r:id="rId13"/>
   </p:sldIdLst>
   <p:sldSz cx="12192000" cy="6858000"/>
   <p:notesSz cx="6858000" cy="9144000"/>
@@ -268,7 +272,7 @@
           <a:p>
             <a:fld id="{87211922-7D03-45AB-9F72-54BC254BD8A2}" type="datetimeFigureOut">
               <a:rPr lang="nl-NL" smtClean="0"/>
-              <a:t>2-5-2026</a:t>
+              <a:t>11-5-2026</a:t>
             </a:fld>
             <a:endParaRPr lang="nl-NL"/>
           </a:p>
@@ -468,7 +472,7 @@
           <a:p>
             <a:fld id="{87211922-7D03-45AB-9F72-54BC254BD8A2}" type="datetimeFigureOut">
               <a:rPr lang="nl-NL" smtClean="0"/>
-              <a:t>2-5-2026</a:t>
+              <a:t>11-5-2026</a:t>
             </a:fld>
             <a:endParaRPr lang="nl-NL"/>
           </a:p>
@@ -678,7 +682,7 @@
           <a:p>
             <a:fld id="{87211922-7D03-45AB-9F72-54BC254BD8A2}" type="datetimeFigureOut">
               <a:rPr lang="nl-NL" smtClean="0"/>
-              <a:t>2-5-2026</a:t>
+              <a:t>11-5-2026</a:t>
             </a:fld>
             <a:endParaRPr lang="nl-NL"/>
           </a:p>
@@ -878,7 +882,7 @@
           <a:p>
             <a:fld id="{87211922-7D03-45AB-9F72-54BC254BD8A2}" type="datetimeFigureOut">
               <a:rPr lang="nl-NL" smtClean="0"/>
-              <a:t>2-5-2026</a:t>
+              <a:t>11-5-2026</a:t>
             </a:fld>
             <a:endParaRPr lang="nl-NL"/>
           </a:p>
@@ -1154,7 +1158,7 @@
           <a:p>
             <a:fld id="{87211922-7D03-45AB-9F72-54BC254BD8A2}" type="datetimeFigureOut">
               <a:rPr lang="nl-NL" smtClean="0"/>
-              <a:t>2-5-2026</a:t>
+              <a:t>11-5-2026</a:t>
             </a:fld>
             <a:endParaRPr lang="nl-NL"/>
           </a:p>
@@ -1422,7 +1426,7 @@
           <a:p>
             <a:fld id="{87211922-7D03-45AB-9F72-54BC254BD8A2}" type="datetimeFigureOut">
               <a:rPr lang="nl-NL" smtClean="0"/>
-              <a:t>2-5-2026</a:t>
+              <a:t>11-5-2026</a:t>
             </a:fld>
             <a:endParaRPr lang="nl-NL"/>
           </a:p>
@@ -1837,7 +1841,7 @@
           <a:p>
             <a:fld id="{87211922-7D03-45AB-9F72-54BC254BD8A2}" type="datetimeFigureOut">
               <a:rPr lang="nl-NL" smtClean="0"/>
-              <a:t>2-5-2026</a:t>
+              <a:t>11-5-2026</a:t>
             </a:fld>
             <a:endParaRPr lang="nl-NL"/>
           </a:p>
@@ -1979,7 +1983,7 @@
           <a:p>
             <a:fld id="{87211922-7D03-45AB-9F72-54BC254BD8A2}" type="datetimeFigureOut">
               <a:rPr lang="nl-NL" smtClean="0"/>
-              <a:t>2-5-2026</a:t>
+              <a:t>11-5-2026</a:t>
             </a:fld>
             <a:endParaRPr lang="nl-NL"/>
           </a:p>
@@ -2092,7 +2096,7 @@
           <a:p>
             <a:fld id="{87211922-7D03-45AB-9F72-54BC254BD8A2}" type="datetimeFigureOut">
               <a:rPr lang="nl-NL" smtClean="0"/>
-              <a:t>2-5-2026</a:t>
+              <a:t>11-5-2026</a:t>
             </a:fld>
             <a:endParaRPr lang="nl-NL"/>
           </a:p>
@@ -2405,7 +2409,7 @@
           <a:p>
             <a:fld id="{87211922-7D03-45AB-9F72-54BC254BD8A2}" type="datetimeFigureOut">
               <a:rPr lang="nl-NL" smtClean="0"/>
-              <a:t>2-5-2026</a:t>
+              <a:t>11-5-2026</a:t>
             </a:fld>
             <a:endParaRPr lang="nl-NL"/>
           </a:p>
@@ -2694,7 +2698,7 @@
           <a:p>
             <a:fld id="{87211922-7D03-45AB-9F72-54BC254BD8A2}" type="datetimeFigureOut">
               <a:rPr lang="nl-NL" smtClean="0"/>
-              <a:t>2-5-2026</a:t>
+              <a:t>11-5-2026</a:t>
             </a:fld>
             <a:endParaRPr lang="nl-NL"/>
           </a:p>
@@ -2937,7 +2941,7 @@
           <a:p>
             <a:fld id="{87211922-7D03-45AB-9F72-54BC254BD8A2}" type="datetimeFigureOut">
               <a:rPr lang="nl-NL" smtClean="0"/>
-              <a:t>2-5-2026</a:t>
+              <a:t>11-5-2026</a:t>
             </a:fld>
             <a:endParaRPr lang="nl-NL"/>
           </a:p>
@@ -3508,6 +3512,414 @@
 </p:sld>
 </file>
 
+<file path=ppt/slides/slide10.xml><?xml version="1.0" encoding="utf-8"?>
+<p:sld xmlns:a="http://schemas.openxmlformats.org/drawingml/2006/main" xmlns:r="http://schemas.openxmlformats.org/officeDocument/2006/relationships" xmlns:p="http://schemas.openxmlformats.org/presentationml/2006/main">
+  <p:cSld>
+    <p:spTree>
+      <p:nvGrpSpPr>
+        <p:cNvPr id="1" name=""/>
+        <p:cNvGrpSpPr/>
+        <p:nvPr/>
+      </p:nvGrpSpPr>
+      <p:grpSpPr>
+        <a:xfrm>
+          <a:off x="0" y="0"/>
+          <a:ext cx="0" cy="0"/>
+          <a:chOff x="0" y="0"/>
+          <a:chExt cx="0" cy="0"/>
+        </a:xfrm>
+      </p:grpSpPr>
+      <p:pic>
+        <p:nvPicPr>
+          <p:cNvPr id="3" name="Picture 2">
+            <a:extLst>
+              <a:ext uri="{FF2B5EF4-FFF2-40B4-BE49-F238E27FC236}">
+                <a16:creationId xmlns:a16="http://schemas.microsoft.com/office/drawing/2014/main" id="{6B153D8A-22FB-C385-E2A8-2D50F6CA885B}"/>
+              </a:ext>
+            </a:extLst>
+          </p:cNvPr>
+          <p:cNvPicPr>
+            <a:picLocks noChangeAspect="1"/>
+          </p:cNvPicPr>
+          <p:nvPr/>
+        </p:nvPicPr>
+        <p:blipFill>
+          <a:blip r:embed="rId2">
+            <a:extLst>
+              <a:ext uri="{28A0092B-C50C-407E-A947-70E740481C1C}">
+                <a14:useLocalDpi xmlns:a14="http://schemas.microsoft.com/office/drawing/2010/main" val="0"/>
+              </a:ext>
+            </a:extLst>
+          </a:blip>
+          <a:stretch>
+            <a:fillRect/>
+          </a:stretch>
+        </p:blipFill>
+        <p:spPr>
+          <a:xfrm>
+            <a:off x="1878707" y="970921"/>
+            <a:ext cx="8434585" cy="4916158"/>
+          </a:xfrm>
+          <a:prstGeom prst="rect">
+            <a:avLst/>
+          </a:prstGeom>
+        </p:spPr>
+      </p:pic>
+      <p:sp>
+        <p:nvSpPr>
+          <p:cNvPr id="4" name="TextBox 3">
+            <a:extLst>
+              <a:ext uri="{FF2B5EF4-FFF2-40B4-BE49-F238E27FC236}">
+                <a16:creationId xmlns:a16="http://schemas.microsoft.com/office/drawing/2014/main" id="{816E2BDB-CF36-1B37-2235-D75D666B7092}"/>
+              </a:ext>
+            </a:extLst>
+          </p:cNvPr>
+          <p:cNvSpPr txBox="1"/>
+          <p:nvPr/>
+        </p:nvSpPr>
+        <p:spPr>
+          <a:xfrm>
+            <a:off x="2414537" y="709311"/>
+            <a:ext cx="635299" cy="523220"/>
+          </a:xfrm>
+          <a:prstGeom prst="rect">
+            <a:avLst/>
+          </a:prstGeom>
+          <a:noFill/>
+        </p:spPr>
+        <p:txBody>
+          <a:bodyPr wrap="square" rtlCol="0">
+            <a:spAutoFit/>
+          </a:bodyPr>
+          <a:lstStyle/>
+          <a:p>
+            <a:r>
+              <a:rPr lang="nl-NL" sz="2800" b="1" dirty="0"/>
+              <a:t>A.</a:t>
+            </a:r>
+          </a:p>
+        </p:txBody>
+      </p:sp>
+      <p:sp>
+        <p:nvSpPr>
+          <p:cNvPr id="5" name="TextBox 4">
+            <a:extLst>
+              <a:ext uri="{FF2B5EF4-FFF2-40B4-BE49-F238E27FC236}">
+                <a16:creationId xmlns:a16="http://schemas.microsoft.com/office/drawing/2014/main" id="{4A1D39C4-F49F-A167-5157-7CD9DC1C6167}"/>
+              </a:ext>
+            </a:extLst>
+          </p:cNvPr>
+          <p:cNvSpPr txBox="1"/>
+          <p:nvPr/>
+        </p:nvSpPr>
+        <p:spPr>
+          <a:xfrm>
+            <a:off x="5778349" y="709311"/>
+            <a:ext cx="635299" cy="523220"/>
+          </a:xfrm>
+          <a:prstGeom prst="rect">
+            <a:avLst/>
+          </a:prstGeom>
+          <a:noFill/>
+        </p:spPr>
+        <p:txBody>
+          <a:bodyPr wrap="square" rtlCol="0">
+            <a:spAutoFit/>
+          </a:bodyPr>
+          <a:lstStyle/>
+          <a:p>
+            <a:r>
+              <a:rPr lang="nl-NL" sz="2800" b="1" dirty="0"/>
+              <a:t>B.</a:t>
+            </a:r>
+          </a:p>
+        </p:txBody>
+      </p:sp>
+    </p:spTree>
+    <p:extLst>
+      <p:ext uri="{BB962C8B-B14F-4D97-AF65-F5344CB8AC3E}">
+        <p14:creationId xmlns:p14="http://schemas.microsoft.com/office/powerpoint/2010/main" val="504158812"/>
+      </p:ext>
+    </p:extLst>
+  </p:cSld>
+  <p:clrMapOvr>
+    <a:masterClrMapping/>
+  </p:clrMapOvr>
+</p:sld>
+</file>
+
+<file path=ppt/slides/slide11.xml><?xml version="1.0" encoding="utf-8"?>
+<p:sld xmlns:a="http://schemas.openxmlformats.org/drawingml/2006/main" xmlns:r="http://schemas.openxmlformats.org/officeDocument/2006/relationships" xmlns:p="http://schemas.openxmlformats.org/presentationml/2006/main">
+  <p:cSld>
+    <p:spTree>
+      <p:nvGrpSpPr>
+        <p:cNvPr id="1" name=""/>
+        <p:cNvGrpSpPr/>
+        <p:nvPr/>
+      </p:nvGrpSpPr>
+      <p:grpSpPr>
+        <a:xfrm>
+          <a:off x="0" y="0"/>
+          <a:ext cx="0" cy="0"/>
+          <a:chOff x="0" y="0"/>
+          <a:chExt cx="0" cy="0"/>
+        </a:xfrm>
+      </p:grpSpPr>
+      <p:pic>
+        <p:nvPicPr>
+          <p:cNvPr id="3" name="Picture 2">
+            <a:extLst>
+              <a:ext uri="{FF2B5EF4-FFF2-40B4-BE49-F238E27FC236}">
+                <a16:creationId xmlns:a16="http://schemas.microsoft.com/office/drawing/2014/main" id="{E14F24C4-D7AE-1424-02AE-7212B389DAD4}"/>
+              </a:ext>
+            </a:extLst>
+          </p:cNvPr>
+          <p:cNvPicPr>
+            <a:picLocks noChangeAspect="1"/>
+          </p:cNvPicPr>
+          <p:nvPr/>
+        </p:nvPicPr>
+        <p:blipFill>
+          <a:blip r:embed="rId2">
+            <a:extLst>
+              <a:ext uri="{28A0092B-C50C-407E-A947-70E740481C1C}">
+                <a14:useLocalDpi xmlns:a14="http://schemas.microsoft.com/office/drawing/2010/main" val="0"/>
+              </a:ext>
+            </a:extLst>
+          </a:blip>
+          <a:stretch>
+            <a:fillRect/>
+          </a:stretch>
+        </p:blipFill>
+        <p:spPr>
+          <a:xfrm>
+            <a:off x="2525720" y="1047543"/>
+            <a:ext cx="7140559" cy="4762913"/>
+          </a:xfrm>
+          <a:prstGeom prst="rect">
+            <a:avLst/>
+          </a:prstGeom>
+        </p:spPr>
+      </p:pic>
+      <p:sp>
+        <p:nvSpPr>
+          <p:cNvPr id="4" name="TextBox 3">
+            <a:extLst>
+              <a:ext uri="{FF2B5EF4-FFF2-40B4-BE49-F238E27FC236}">
+                <a16:creationId xmlns:a16="http://schemas.microsoft.com/office/drawing/2014/main" id="{4FC139EF-67EE-C075-8F02-CBF24302ACA2}"/>
+              </a:ext>
+            </a:extLst>
+          </p:cNvPr>
+          <p:cNvSpPr txBox="1"/>
+          <p:nvPr/>
+        </p:nvSpPr>
+        <p:spPr>
+          <a:xfrm>
+            <a:off x="2674887" y="652161"/>
+            <a:ext cx="635299" cy="523220"/>
+          </a:xfrm>
+          <a:prstGeom prst="rect">
+            <a:avLst/>
+          </a:prstGeom>
+          <a:noFill/>
+        </p:spPr>
+        <p:txBody>
+          <a:bodyPr wrap="square" rtlCol="0">
+            <a:spAutoFit/>
+          </a:bodyPr>
+          <a:lstStyle/>
+          <a:p>
+            <a:r>
+              <a:rPr lang="nl-NL" sz="2800" b="1" dirty="0"/>
+              <a:t>A.</a:t>
+            </a:r>
+          </a:p>
+        </p:txBody>
+      </p:sp>
+      <p:sp>
+        <p:nvSpPr>
+          <p:cNvPr id="5" name="TextBox 4">
+            <a:extLst>
+              <a:ext uri="{FF2B5EF4-FFF2-40B4-BE49-F238E27FC236}">
+                <a16:creationId xmlns:a16="http://schemas.microsoft.com/office/drawing/2014/main" id="{AA234945-5CC8-DB7F-EFFB-FC1A3098EA0D}"/>
+              </a:ext>
+            </a:extLst>
+          </p:cNvPr>
+          <p:cNvSpPr txBox="1"/>
+          <p:nvPr/>
+        </p:nvSpPr>
+        <p:spPr>
+          <a:xfrm>
+            <a:off x="5852933" y="652161"/>
+            <a:ext cx="635299" cy="523220"/>
+          </a:xfrm>
+          <a:prstGeom prst="rect">
+            <a:avLst/>
+          </a:prstGeom>
+          <a:noFill/>
+        </p:spPr>
+        <p:txBody>
+          <a:bodyPr wrap="square" rtlCol="0">
+            <a:spAutoFit/>
+          </a:bodyPr>
+          <a:lstStyle/>
+          <a:p>
+            <a:r>
+              <a:rPr lang="nl-NL" sz="2800" b="1" dirty="0"/>
+              <a:t>B.</a:t>
+            </a:r>
+          </a:p>
+        </p:txBody>
+      </p:sp>
+    </p:spTree>
+    <p:extLst>
+      <p:ext uri="{BB962C8B-B14F-4D97-AF65-F5344CB8AC3E}">
+        <p14:creationId xmlns:p14="http://schemas.microsoft.com/office/powerpoint/2010/main" val="3764809862"/>
+      </p:ext>
+    </p:extLst>
+  </p:cSld>
+  <p:clrMapOvr>
+    <a:masterClrMapping/>
+  </p:clrMapOvr>
+</p:sld>
+</file>
+
+<file path=ppt/slides/slide12.xml><?xml version="1.0" encoding="utf-8"?>
+<p:sld xmlns:a="http://schemas.openxmlformats.org/drawingml/2006/main" xmlns:r="http://schemas.openxmlformats.org/officeDocument/2006/relationships" xmlns:p="http://schemas.openxmlformats.org/presentationml/2006/main">
+  <p:cSld>
+    <p:spTree>
+      <p:nvGrpSpPr>
+        <p:cNvPr id="1" name=""/>
+        <p:cNvGrpSpPr/>
+        <p:nvPr/>
+      </p:nvGrpSpPr>
+      <p:grpSpPr>
+        <a:xfrm>
+          <a:off x="0" y="0"/>
+          <a:ext cx="0" cy="0"/>
+          <a:chOff x="0" y="0"/>
+          <a:chExt cx="0" cy="0"/>
+        </a:xfrm>
+      </p:grpSpPr>
+      <p:pic>
+        <p:nvPicPr>
+          <p:cNvPr id="3" name="Picture 2">
+            <a:extLst>
+              <a:ext uri="{FF2B5EF4-FFF2-40B4-BE49-F238E27FC236}">
+                <a16:creationId xmlns:a16="http://schemas.microsoft.com/office/drawing/2014/main" id="{91625D24-E637-EEA5-530B-9214EF46C9F2}"/>
+              </a:ext>
+            </a:extLst>
+          </p:cNvPr>
+          <p:cNvPicPr>
+            <a:picLocks noChangeAspect="1"/>
+          </p:cNvPicPr>
+          <p:nvPr/>
+        </p:nvPicPr>
+        <p:blipFill>
+          <a:blip r:embed="rId2">
+            <a:extLst>
+              <a:ext uri="{28A0092B-C50C-407E-A947-70E740481C1C}">
+                <a14:useLocalDpi xmlns:a14="http://schemas.microsoft.com/office/drawing/2010/main" val="0"/>
+              </a:ext>
+            </a:extLst>
+          </a:blip>
+          <a:stretch>
+            <a:fillRect/>
+          </a:stretch>
+        </p:blipFill>
+        <p:spPr>
+          <a:xfrm>
+            <a:off x="1333087" y="571252"/>
+            <a:ext cx="9525825" cy="5715495"/>
+          </a:xfrm>
+          <a:prstGeom prst="rect">
+            <a:avLst/>
+          </a:prstGeom>
+        </p:spPr>
+      </p:pic>
+      <p:sp>
+        <p:nvSpPr>
+          <p:cNvPr id="4" name="TextBox 3">
+            <a:extLst>
+              <a:ext uri="{FF2B5EF4-FFF2-40B4-BE49-F238E27FC236}">
+                <a16:creationId xmlns:a16="http://schemas.microsoft.com/office/drawing/2014/main" id="{3E29A456-4E49-EC75-0A6B-49FAB8C3CAC7}"/>
+              </a:ext>
+            </a:extLst>
+          </p:cNvPr>
+          <p:cNvSpPr txBox="1"/>
+          <p:nvPr/>
+        </p:nvSpPr>
+        <p:spPr>
+          <a:xfrm>
+            <a:off x="1484823" y="100832"/>
+            <a:ext cx="686877" cy="646331"/>
+          </a:xfrm>
+          <a:prstGeom prst="rect">
+            <a:avLst/>
+          </a:prstGeom>
+          <a:noFill/>
+        </p:spPr>
+        <p:txBody>
+          <a:bodyPr wrap="square" rtlCol="0">
+            <a:spAutoFit/>
+          </a:bodyPr>
+          <a:lstStyle/>
+          <a:p>
+            <a:r>
+              <a:rPr lang="nl-NL" sz="3600" b="1" dirty="0"/>
+              <a:t>A.</a:t>
+            </a:r>
+          </a:p>
+        </p:txBody>
+      </p:sp>
+      <p:sp>
+        <p:nvSpPr>
+          <p:cNvPr id="5" name="TextBox 4">
+            <a:extLst>
+              <a:ext uri="{FF2B5EF4-FFF2-40B4-BE49-F238E27FC236}">
+                <a16:creationId xmlns:a16="http://schemas.microsoft.com/office/drawing/2014/main" id="{EC1ACA1C-22B2-4658-EFB1-7FB8E77D8235}"/>
+              </a:ext>
+            </a:extLst>
+          </p:cNvPr>
+          <p:cNvSpPr txBox="1"/>
+          <p:nvPr/>
+        </p:nvSpPr>
+        <p:spPr>
+          <a:xfrm>
+            <a:off x="6323523" y="100832"/>
+            <a:ext cx="686877" cy="646331"/>
+          </a:xfrm>
+          <a:prstGeom prst="rect">
+            <a:avLst/>
+          </a:prstGeom>
+          <a:noFill/>
+        </p:spPr>
+        <p:txBody>
+          <a:bodyPr wrap="square" rtlCol="0">
+            <a:spAutoFit/>
+          </a:bodyPr>
+          <a:lstStyle/>
+          <a:p>
+            <a:r>
+              <a:rPr lang="nl-NL" sz="3600" b="1" dirty="0"/>
+              <a:t>B.</a:t>
+            </a:r>
+          </a:p>
+        </p:txBody>
+      </p:sp>
+    </p:spTree>
+    <p:extLst>
+      <p:ext uri="{BB962C8B-B14F-4D97-AF65-F5344CB8AC3E}">
+        <p14:creationId xmlns:p14="http://schemas.microsoft.com/office/powerpoint/2010/main" val="3066317134"/>
+      </p:ext>
+    </p:extLst>
+  </p:cSld>
+  <p:clrMapOvr>
+    <a:masterClrMapping/>
+  </p:clrMapOvr>
+</p:sld>
+</file>
+
 <file path=ppt/slides/slide2.xml><?xml version="1.0" encoding="utf-8"?>
 <p:sld xmlns:a="http://schemas.openxmlformats.org/drawingml/2006/main" xmlns:r="http://schemas.openxmlformats.org/officeDocument/2006/relationships" xmlns:p="http://schemas.openxmlformats.org/presentationml/2006/main">
   <p:cSld>
@@ -3530,7 +3942,7 @@
           <p:cNvPr id="3" name="Picture 2">
             <a:extLst>
               <a:ext uri="{FF2B5EF4-FFF2-40B4-BE49-F238E27FC236}">
-                <a16:creationId xmlns:a16="http://schemas.microsoft.com/office/drawing/2014/main" id="{B8E98293-20A7-D3BD-69B9-F5DF2C60F578}"/>
+                <a16:creationId xmlns:a16="http://schemas.microsoft.com/office/drawing/2014/main" id="{85321323-3AD9-9B84-69A1-545C34A9EE08}"/>
               </a:ext>
             </a:extLst>
           </p:cNvPr>
@@ -3553,8 +3965,8 @@
         </p:blipFill>
         <p:spPr>
           <a:xfrm>
-            <a:off x="1963882" y="998005"/>
-            <a:ext cx="8593282" cy="4861989"/>
+            <a:off x="1247216" y="1226575"/>
+            <a:ext cx="9697568" cy="4404850"/>
           </a:xfrm>
           <a:prstGeom prst="rect">
             <a:avLst/>
@@ -3566,7 +3978,7 @@
           <p:cNvPr id="4" name="TextBox 3">
             <a:extLst>
               <a:ext uri="{FF2B5EF4-FFF2-40B4-BE49-F238E27FC236}">
-                <a16:creationId xmlns:a16="http://schemas.microsoft.com/office/drawing/2014/main" id="{6A18AF42-CD9B-0E95-E0B0-804D4BA54530}"/>
+                <a16:creationId xmlns:a16="http://schemas.microsoft.com/office/drawing/2014/main" id="{2C86B1C3-2F7E-3C3D-BCEC-8E3DB67F39DF}"/>
               </a:ext>
             </a:extLst>
           </p:cNvPr>
@@ -3575,7 +3987,7 @@
         </p:nvSpPr>
         <p:spPr>
           <a:xfrm>
-            <a:off x="2265217" y="736395"/>
+            <a:off x="1586791" y="785556"/>
             <a:ext cx="623455" cy="523220"/>
           </a:xfrm>
           <a:prstGeom prst="rect">
@@ -3601,7 +4013,7 @@
           <p:cNvPr id="5" name="TextBox 4">
             <a:extLst>
               <a:ext uri="{FF2B5EF4-FFF2-40B4-BE49-F238E27FC236}">
-                <a16:creationId xmlns:a16="http://schemas.microsoft.com/office/drawing/2014/main" id="{F6FBEDE1-0EEC-2C66-5963-7D2F96E9C973}"/>
+                <a16:creationId xmlns:a16="http://schemas.microsoft.com/office/drawing/2014/main" id="{9679E7C4-55C0-3458-7612-792768148EAD}"/>
               </a:ext>
             </a:extLst>
           </p:cNvPr>
@@ -3610,7 +4022,7 @@
         </p:nvSpPr>
         <p:spPr>
           <a:xfrm>
-            <a:off x="5808515" y="736395"/>
+            <a:off x="6591410" y="785556"/>
             <a:ext cx="623455" cy="523220"/>
           </a:xfrm>
           <a:prstGeom prst="rect">
@@ -3634,7 +4046,7 @@
     </p:spTree>
     <p:extLst>
       <p:ext uri="{BB962C8B-B14F-4D97-AF65-F5344CB8AC3E}">
-        <p14:creationId xmlns:p14="http://schemas.microsoft.com/office/powerpoint/2010/main" val="1424029119"/>
+        <p14:creationId xmlns:p14="http://schemas.microsoft.com/office/powerpoint/2010/main" val="3928605016"/>
       </p:ext>
     </p:extLst>
   </p:cSld>
@@ -3661,84 +4073,12 @@
           <a:chExt cx="0" cy="0"/>
         </a:xfrm>
       </p:grpSpPr>
-      <p:sp>
-        <p:nvSpPr>
-          <p:cNvPr id="4" name="TextBox 3">
-            <a:extLst>
-              <a:ext uri="{FF2B5EF4-FFF2-40B4-BE49-F238E27FC236}">
-                <a16:creationId xmlns:a16="http://schemas.microsoft.com/office/drawing/2014/main" id="{1A504320-5A29-E8F3-9A26-2C4DDB6F54F1}"/>
-              </a:ext>
-            </a:extLst>
-          </p:cNvPr>
-          <p:cNvSpPr txBox="1"/>
-          <p:nvPr/>
-        </p:nvSpPr>
-        <p:spPr>
-          <a:xfrm>
-            <a:off x="3199787" y="1055594"/>
-            <a:ext cx="623455" cy="461665"/>
-          </a:xfrm>
-          <a:prstGeom prst="rect">
-            <a:avLst/>
-          </a:prstGeom>
-          <a:noFill/>
-        </p:spPr>
-        <p:txBody>
-          <a:bodyPr wrap="square" rtlCol="0">
-            <a:spAutoFit/>
-          </a:bodyPr>
-          <a:lstStyle/>
-          <a:p>
-            <a:r>
-              <a:rPr lang="nl-NL" sz="2400" b="1" dirty="0"/>
-              <a:t>A.</a:t>
-            </a:r>
-            <a:endParaRPr lang="nl-NL" sz="3200" b="1" dirty="0"/>
-          </a:p>
-        </p:txBody>
-      </p:sp>
-      <p:sp>
-        <p:nvSpPr>
-          <p:cNvPr id="6" name="TextBox 5">
-            <a:extLst>
-              <a:ext uri="{FF2B5EF4-FFF2-40B4-BE49-F238E27FC236}">
-                <a16:creationId xmlns:a16="http://schemas.microsoft.com/office/drawing/2014/main" id="{E8300A47-4032-A8DE-FF75-286E05A6DCA4}"/>
-              </a:ext>
-            </a:extLst>
-          </p:cNvPr>
-          <p:cNvSpPr txBox="1"/>
-          <p:nvPr/>
-        </p:nvSpPr>
-        <p:spPr>
-          <a:xfrm>
-            <a:off x="6205817" y="1055593"/>
-            <a:ext cx="790932" cy="461665"/>
-          </a:xfrm>
-          <a:prstGeom prst="rect">
-            <a:avLst/>
-          </a:prstGeom>
-          <a:noFill/>
-        </p:spPr>
-        <p:txBody>
-          <a:bodyPr wrap="square" rtlCol="0">
-            <a:spAutoFit/>
-          </a:bodyPr>
-          <a:lstStyle/>
-          <a:p>
-            <a:r>
-              <a:rPr lang="nl-NL" sz="2400" b="1" dirty="0"/>
-              <a:t>B.</a:t>
-            </a:r>
-            <a:endParaRPr lang="nl-NL" b="1" dirty="0"/>
-          </a:p>
-        </p:txBody>
-      </p:sp>
       <p:pic>
         <p:nvPicPr>
-          <p:cNvPr id="10" name="Picture 9">
-            <a:extLst>
-              <a:ext uri="{FF2B5EF4-FFF2-40B4-BE49-F238E27FC236}">
-                <a16:creationId xmlns:a16="http://schemas.microsoft.com/office/drawing/2014/main" id="{54A6FC5A-E2E5-05A6-C8D3-7B1CCD1DD27A}"/>
+          <p:cNvPr id="3" name="Picture 2">
+            <a:extLst>
+              <a:ext uri="{FF2B5EF4-FFF2-40B4-BE49-F238E27FC236}">
+                <a16:creationId xmlns:a16="http://schemas.microsoft.com/office/drawing/2014/main" id="{B8E98293-20A7-D3BD-69B9-F5DF2C60F578}"/>
               </a:ext>
             </a:extLst>
           </p:cNvPr>
@@ -3761,18 +4101,88 @@
         </p:blipFill>
         <p:spPr>
           <a:xfrm>
-            <a:off x="3002012" y="1459059"/>
-            <a:ext cx="6187976" cy="3939881"/>
+            <a:off x="1963882" y="998005"/>
+            <a:ext cx="8593282" cy="4861989"/>
           </a:xfrm>
           <a:prstGeom prst="rect">
             <a:avLst/>
           </a:prstGeom>
         </p:spPr>
       </p:pic>
+      <p:sp>
+        <p:nvSpPr>
+          <p:cNvPr id="4" name="TextBox 3">
+            <a:extLst>
+              <a:ext uri="{FF2B5EF4-FFF2-40B4-BE49-F238E27FC236}">
+                <a16:creationId xmlns:a16="http://schemas.microsoft.com/office/drawing/2014/main" id="{6A18AF42-CD9B-0E95-E0B0-804D4BA54530}"/>
+              </a:ext>
+            </a:extLst>
+          </p:cNvPr>
+          <p:cNvSpPr txBox="1"/>
+          <p:nvPr/>
+        </p:nvSpPr>
+        <p:spPr>
+          <a:xfrm>
+            <a:off x="2265217" y="736395"/>
+            <a:ext cx="623455" cy="523220"/>
+          </a:xfrm>
+          <a:prstGeom prst="rect">
+            <a:avLst/>
+          </a:prstGeom>
+          <a:noFill/>
+        </p:spPr>
+        <p:txBody>
+          <a:bodyPr wrap="square" rtlCol="0">
+            <a:spAutoFit/>
+          </a:bodyPr>
+          <a:lstStyle/>
+          <a:p>
+            <a:r>
+              <a:rPr lang="nl-NL" sz="2800" b="1" dirty="0"/>
+              <a:t>A.</a:t>
+            </a:r>
+          </a:p>
+        </p:txBody>
+      </p:sp>
+      <p:sp>
+        <p:nvSpPr>
+          <p:cNvPr id="5" name="TextBox 4">
+            <a:extLst>
+              <a:ext uri="{FF2B5EF4-FFF2-40B4-BE49-F238E27FC236}">
+                <a16:creationId xmlns:a16="http://schemas.microsoft.com/office/drawing/2014/main" id="{F6FBEDE1-0EEC-2C66-5963-7D2F96E9C973}"/>
+              </a:ext>
+            </a:extLst>
+          </p:cNvPr>
+          <p:cNvSpPr txBox="1"/>
+          <p:nvPr/>
+        </p:nvSpPr>
+        <p:spPr>
+          <a:xfrm>
+            <a:off x="5808515" y="736395"/>
+            <a:ext cx="623455" cy="523220"/>
+          </a:xfrm>
+          <a:prstGeom prst="rect">
+            <a:avLst/>
+          </a:prstGeom>
+          <a:noFill/>
+        </p:spPr>
+        <p:txBody>
+          <a:bodyPr wrap="square" rtlCol="0">
+            <a:spAutoFit/>
+          </a:bodyPr>
+          <a:lstStyle/>
+          <a:p>
+            <a:r>
+              <a:rPr lang="nl-NL" sz="2800" b="1" dirty="0"/>
+              <a:t>B.</a:t>
+            </a:r>
+          </a:p>
+        </p:txBody>
+      </p:sp>
     </p:spTree>
     <p:extLst>
       <p:ext uri="{BB962C8B-B14F-4D97-AF65-F5344CB8AC3E}">
-        <p14:creationId xmlns:p14="http://schemas.microsoft.com/office/powerpoint/2010/main" val="870808947"/>
+        <p14:creationId xmlns:p14="http://schemas.microsoft.com/office/powerpoint/2010/main" val="1424029119"/>
       </p:ext>
     </p:extLst>
   </p:cSld>
@@ -3799,12 +4209,84 @@
           <a:chExt cx="0" cy="0"/>
         </a:xfrm>
       </p:grpSpPr>
+      <p:sp>
+        <p:nvSpPr>
+          <p:cNvPr id="4" name="TextBox 3">
+            <a:extLst>
+              <a:ext uri="{FF2B5EF4-FFF2-40B4-BE49-F238E27FC236}">
+                <a16:creationId xmlns:a16="http://schemas.microsoft.com/office/drawing/2014/main" id="{1A504320-5A29-E8F3-9A26-2C4DDB6F54F1}"/>
+              </a:ext>
+            </a:extLst>
+          </p:cNvPr>
+          <p:cNvSpPr txBox="1"/>
+          <p:nvPr/>
+        </p:nvSpPr>
+        <p:spPr>
+          <a:xfrm>
+            <a:off x="3199787" y="1055594"/>
+            <a:ext cx="623455" cy="461665"/>
+          </a:xfrm>
+          <a:prstGeom prst="rect">
+            <a:avLst/>
+          </a:prstGeom>
+          <a:noFill/>
+        </p:spPr>
+        <p:txBody>
+          <a:bodyPr wrap="square" rtlCol="0">
+            <a:spAutoFit/>
+          </a:bodyPr>
+          <a:lstStyle/>
+          <a:p>
+            <a:r>
+              <a:rPr lang="nl-NL" sz="2400" b="1" dirty="0"/>
+              <a:t>A.</a:t>
+            </a:r>
+            <a:endParaRPr lang="nl-NL" sz="3200" b="1" dirty="0"/>
+          </a:p>
+        </p:txBody>
+      </p:sp>
+      <p:sp>
+        <p:nvSpPr>
+          <p:cNvPr id="6" name="TextBox 5">
+            <a:extLst>
+              <a:ext uri="{FF2B5EF4-FFF2-40B4-BE49-F238E27FC236}">
+                <a16:creationId xmlns:a16="http://schemas.microsoft.com/office/drawing/2014/main" id="{E8300A47-4032-A8DE-FF75-286E05A6DCA4}"/>
+              </a:ext>
+            </a:extLst>
+          </p:cNvPr>
+          <p:cNvSpPr txBox="1"/>
+          <p:nvPr/>
+        </p:nvSpPr>
+        <p:spPr>
+          <a:xfrm>
+            <a:off x="6205817" y="1055593"/>
+            <a:ext cx="790932" cy="461665"/>
+          </a:xfrm>
+          <a:prstGeom prst="rect">
+            <a:avLst/>
+          </a:prstGeom>
+          <a:noFill/>
+        </p:spPr>
+        <p:txBody>
+          <a:bodyPr wrap="square" rtlCol="0">
+            <a:spAutoFit/>
+          </a:bodyPr>
+          <a:lstStyle/>
+          <a:p>
+            <a:r>
+              <a:rPr lang="nl-NL" sz="2400" b="1" dirty="0"/>
+              <a:t>B.</a:t>
+            </a:r>
+            <a:endParaRPr lang="nl-NL" b="1" dirty="0"/>
+          </a:p>
+        </p:txBody>
+      </p:sp>
       <p:pic>
         <p:nvPicPr>
-          <p:cNvPr id="3" name="Picture 2">
-            <a:extLst>
-              <a:ext uri="{FF2B5EF4-FFF2-40B4-BE49-F238E27FC236}">
-                <a16:creationId xmlns:a16="http://schemas.microsoft.com/office/drawing/2014/main" id="{314D3A4C-3D31-EB92-0059-8DD0E863DFD7}"/>
+          <p:cNvPr id="10" name="Picture 9">
+            <a:extLst>
+              <a:ext uri="{FF2B5EF4-FFF2-40B4-BE49-F238E27FC236}">
+                <a16:creationId xmlns:a16="http://schemas.microsoft.com/office/drawing/2014/main" id="{54A6FC5A-E2E5-05A6-C8D3-7B1CCD1DD27A}"/>
               </a:ext>
             </a:extLst>
           </p:cNvPr>
@@ -3827,90 +4309,18 @@
         </p:blipFill>
         <p:spPr>
           <a:xfrm>
-            <a:off x="1022096" y="894303"/>
-            <a:ext cx="10298665" cy="5144755"/>
+            <a:off x="3002012" y="1459059"/>
+            <a:ext cx="6187976" cy="3939881"/>
           </a:xfrm>
           <a:prstGeom prst="rect">
             <a:avLst/>
           </a:prstGeom>
         </p:spPr>
       </p:pic>
-      <p:sp>
-        <p:nvSpPr>
-          <p:cNvPr id="4" name="TextBox 3">
-            <a:extLst>
-              <a:ext uri="{FF2B5EF4-FFF2-40B4-BE49-F238E27FC236}">
-                <a16:creationId xmlns:a16="http://schemas.microsoft.com/office/drawing/2014/main" id="{8E9C8249-BC5B-8206-8FA0-62DB0A0CF9B2}"/>
-              </a:ext>
-            </a:extLst>
-          </p:cNvPr>
-          <p:cNvSpPr txBox="1"/>
-          <p:nvPr/>
-        </p:nvSpPr>
-        <p:spPr>
-          <a:xfrm>
-            <a:off x="1340842" y="309528"/>
-            <a:ext cx="623455" cy="523220"/>
-          </a:xfrm>
-          <a:prstGeom prst="rect">
-            <a:avLst/>
-          </a:prstGeom>
-          <a:noFill/>
-        </p:spPr>
-        <p:txBody>
-          <a:bodyPr wrap="square" rtlCol="0">
-            <a:spAutoFit/>
-          </a:bodyPr>
-          <a:lstStyle/>
-          <a:p>
-            <a:r>
-              <a:rPr lang="nl-NL" sz="2800" b="1" dirty="0"/>
-              <a:t>A.</a:t>
-            </a:r>
-            <a:endParaRPr lang="nl-NL" sz="3600" b="1" dirty="0"/>
-          </a:p>
-        </p:txBody>
-      </p:sp>
-      <p:sp>
-        <p:nvSpPr>
-          <p:cNvPr id="5" name="TextBox 4">
-            <a:extLst>
-              <a:ext uri="{FF2B5EF4-FFF2-40B4-BE49-F238E27FC236}">
-                <a16:creationId xmlns:a16="http://schemas.microsoft.com/office/drawing/2014/main" id="{3800322A-556A-10ED-5B13-6CFBD0B974CD}"/>
-              </a:ext>
-            </a:extLst>
-          </p:cNvPr>
-          <p:cNvSpPr txBox="1"/>
-          <p:nvPr/>
-        </p:nvSpPr>
-        <p:spPr>
-          <a:xfrm>
-            <a:off x="7049978" y="309528"/>
-            <a:ext cx="623455" cy="523220"/>
-          </a:xfrm>
-          <a:prstGeom prst="rect">
-            <a:avLst/>
-          </a:prstGeom>
-          <a:noFill/>
-        </p:spPr>
-        <p:txBody>
-          <a:bodyPr wrap="square" rtlCol="0">
-            <a:spAutoFit/>
-          </a:bodyPr>
-          <a:lstStyle/>
-          <a:p>
-            <a:r>
-              <a:rPr lang="nl-NL" sz="2800" b="1" dirty="0"/>
-              <a:t>B.</a:t>
-            </a:r>
-            <a:endParaRPr lang="nl-NL" sz="3600" b="1" dirty="0"/>
-          </a:p>
-        </p:txBody>
-      </p:sp>
     </p:spTree>
     <p:extLst>
       <p:ext uri="{BB962C8B-B14F-4D97-AF65-F5344CB8AC3E}">
-        <p14:creationId xmlns:p14="http://schemas.microsoft.com/office/powerpoint/2010/main" val="239576753"/>
+        <p14:creationId xmlns:p14="http://schemas.microsoft.com/office/powerpoint/2010/main" val="870808947"/>
       </p:ext>
     </p:extLst>
   </p:cSld>
@@ -3942,7 +4352,7 @@
           <p:cNvPr id="3" name="Picture 2">
             <a:extLst>
               <a:ext uri="{FF2B5EF4-FFF2-40B4-BE49-F238E27FC236}">
-                <a16:creationId xmlns:a16="http://schemas.microsoft.com/office/drawing/2014/main" id="{79C47C6C-CD54-2C8D-5F78-212B9658200B}"/>
+                <a16:creationId xmlns:a16="http://schemas.microsoft.com/office/drawing/2014/main" id="{314D3A4C-3D31-EB92-0059-8DD0E863DFD7}"/>
               </a:ext>
             </a:extLst>
           </p:cNvPr>
@@ -3965,8 +4375,8 @@
         </p:blipFill>
         <p:spPr>
           <a:xfrm>
-            <a:off x="2525720" y="1462869"/>
-            <a:ext cx="7532680" cy="4148200"/>
+            <a:off x="1022096" y="894303"/>
+            <a:ext cx="10298665" cy="5144755"/>
           </a:xfrm>
           <a:prstGeom prst="rect">
             <a:avLst/>
@@ -3975,10 +4385,10 @@
       </p:pic>
       <p:sp>
         <p:nvSpPr>
-          <p:cNvPr id="6" name="TextBox 5">
-            <a:extLst>
-              <a:ext uri="{FF2B5EF4-FFF2-40B4-BE49-F238E27FC236}">
-                <a16:creationId xmlns:a16="http://schemas.microsoft.com/office/drawing/2014/main" id="{F1EA1996-869B-40B7-B8DD-9B474287B32B}"/>
+          <p:cNvPr id="4" name="TextBox 3">
+            <a:extLst>
+              <a:ext uri="{FF2B5EF4-FFF2-40B4-BE49-F238E27FC236}">
+                <a16:creationId xmlns:a16="http://schemas.microsoft.com/office/drawing/2014/main" id="{8E9C8249-BC5B-8206-8FA0-62DB0A0CF9B2}"/>
               </a:ext>
             </a:extLst>
           </p:cNvPr>
@@ -3987,8 +4397,8 @@
         </p:nvSpPr>
         <p:spPr>
           <a:xfrm>
-            <a:off x="2786326" y="1110021"/>
-            <a:ext cx="635299" cy="523220"/>
+            <a:off x="1340842" y="309528"/>
+            <a:ext cx="623455" cy="523220"/>
           </a:xfrm>
           <a:prstGeom prst="rect">
             <a:avLst/>
@@ -4005,15 +4415,16 @@
               <a:rPr lang="nl-NL" sz="2800" b="1" dirty="0"/>
               <a:t>A.</a:t>
             </a:r>
-          </a:p>
-        </p:txBody>
-      </p:sp>
-      <p:sp>
-        <p:nvSpPr>
-          <p:cNvPr id="7" name="TextBox 6">
-            <a:extLst>
-              <a:ext uri="{FF2B5EF4-FFF2-40B4-BE49-F238E27FC236}">
-                <a16:creationId xmlns:a16="http://schemas.microsoft.com/office/drawing/2014/main" id="{F3995E65-FF4F-D16C-C11A-549F8CA2FCA6}"/>
+            <a:endParaRPr lang="nl-NL" sz="3600" b="1" dirty="0"/>
+          </a:p>
+        </p:txBody>
+      </p:sp>
+      <p:sp>
+        <p:nvSpPr>
+          <p:cNvPr id="5" name="TextBox 4">
+            <a:extLst>
+              <a:ext uri="{FF2B5EF4-FFF2-40B4-BE49-F238E27FC236}">
+                <a16:creationId xmlns:a16="http://schemas.microsoft.com/office/drawing/2014/main" id="{3800322A-556A-10ED-5B13-6CFBD0B974CD}"/>
               </a:ext>
             </a:extLst>
           </p:cNvPr>
@@ -4022,7 +4433,7 @@
         </p:nvSpPr>
         <p:spPr>
           <a:xfrm>
-            <a:off x="5844160" y="1110021"/>
+            <a:off x="7049978" y="309528"/>
             <a:ext cx="623455" cy="523220"/>
           </a:xfrm>
           <a:prstGeom prst="rect">
@@ -4040,13 +4451,14 @@
               <a:rPr lang="nl-NL" sz="2800" b="1" dirty="0"/>
               <a:t>B.</a:t>
             </a:r>
+            <a:endParaRPr lang="nl-NL" sz="3600" b="1" dirty="0"/>
           </a:p>
         </p:txBody>
       </p:sp>
     </p:spTree>
     <p:extLst>
       <p:ext uri="{BB962C8B-B14F-4D97-AF65-F5344CB8AC3E}">
-        <p14:creationId xmlns:p14="http://schemas.microsoft.com/office/powerpoint/2010/main" val="3015964336"/>
+        <p14:creationId xmlns:p14="http://schemas.microsoft.com/office/powerpoint/2010/main" val="239576753"/>
       </p:ext>
     </p:extLst>
   </p:cSld>
@@ -4078,7 +4490,7 @@
           <p:cNvPr id="3" name="Picture 2">
             <a:extLst>
               <a:ext uri="{FF2B5EF4-FFF2-40B4-BE49-F238E27FC236}">
-                <a16:creationId xmlns:a16="http://schemas.microsoft.com/office/drawing/2014/main" id="{31180763-4446-1E34-088E-91C0898E7C57}"/>
+                <a16:creationId xmlns:a16="http://schemas.microsoft.com/office/drawing/2014/main" id="{79C47C6C-CD54-2C8D-5F78-212B9658200B}"/>
               </a:ext>
             </a:extLst>
           </p:cNvPr>
@@ -4101,8 +4513,8 @@
         </p:blipFill>
         <p:spPr>
           <a:xfrm>
-            <a:off x="781050" y="1151164"/>
-            <a:ext cx="10629900" cy="4555672"/>
+            <a:off x="2525720" y="1462869"/>
+            <a:ext cx="7532680" cy="4148200"/>
           </a:xfrm>
           <a:prstGeom prst="rect">
             <a:avLst/>
@@ -4111,10 +4523,10 @@
       </p:pic>
       <p:sp>
         <p:nvSpPr>
-          <p:cNvPr id="4" name="TextBox 3">
-            <a:extLst>
-              <a:ext uri="{FF2B5EF4-FFF2-40B4-BE49-F238E27FC236}">
-                <a16:creationId xmlns:a16="http://schemas.microsoft.com/office/drawing/2014/main" id="{05284242-EE64-3AE5-BE47-AD78FD3DA911}"/>
+          <p:cNvPr id="6" name="TextBox 5">
+            <a:extLst>
+              <a:ext uri="{FF2B5EF4-FFF2-40B4-BE49-F238E27FC236}">
+                <a16:creationId xmlns:a16="http://schemas.microsoft.com/office/drawing/2014/main" id="{F1EA1996-869B-40B7-B8DD-9B474287B32B}"/>
               </a:ext>
             </a:extLst>
           </p:cNvPr>
@@ -4123,7 +4535,7 @@
         </p:nvSpPr>
         <p:spPr>
           <a:xfrm>
-            <a:off x="897014" y="773844"/>
+            <a:off x="2786326" y="1110021"/>
             <a:ext cx="635299" cy="523220"/>
           </a:xfrm>
           <a:prstGeom prst="rect">
@@ -4146,10 +4558,10 @@
       </p:sp>
       <p:sp>
         <p:nvSpPr>
-          <p:cNvPr id="5" name="TextBox 4">
-            <a:extLst>
-              <a:ext uri="{FF2B5EF4-FFF2-40B4-BE49-F238E27FC236}">
-                <a16:creationId xmlns:a16="http://schemas.microsoft.com/office/drawing/2014/main" id="{15C4985A-C71A-68BC-1563-F3737E08DA8D}"/>
+          <p:cNvPr id="7" name="TextBox 6">
+            <a:extLst>
+              <a:ext uri="{FF2B5EF4-FFF2-40B4-BE49-F238E27FC236}">
+                <a16:creationId xmlns:a16="http://schemas.microsoft.com/office/drawing/2014/main" id="{F3995E65-FF4F-D16C-C11A-549F8CA2FCA6}"/>
               </a:ext>
             </a:extLst>
           </p:cNvPr>
@@ -4158,8 +4570,8 @@
         </p:nvSpPr>
         <p:spPr>
           <a:xfrm>
-            <a:off x="5374885" y="773844"/>
-            <a:ext cx="635299" cy="523220"/>
+            <a:off x="5844160" y="1110021"/>
+            <a:ext cx="623455" cy="523220"/>
           </a:xfrm>
           <a:prstGeom prst="rect">
             <a:avLst/>
@@ -4182,7 +4594,7 @@
     </p:spTree>
     <p:extLst>
       <p:ext uri="{BB962C8B-B14F-4D97-AF65-F5344CB8AC3E}">
-        <p14:creationId xmlns:p14="http://schemas.microsoft.com/office/powerpoint/2010/main" val="1703736076"/>
+        <p14:creationId xmlns:p14="http://schemas.microsoft.com/office/powerpoint/2010/main" val="3015964336"/>
       </p:ext>
     </p:extLst>
   </p:cSld>
@@ -4214,7 +4626,7 @@
           <p:cNvPr id="3" name="Picture 2">
             <a:extLst>
               <a:ext uri="{FF2B5EF4-FFF2-40B4-BE49-F238E27FC236}">
-                <a16:creationId xmlns:a16="http://schemas.microsoft.com/office/drawing/2014/main" id="{FE6B004D-D557-23B6-5E45-61416802EC4D}"/>
+                <a16:creationId xmlns:a16="http://schemas.microsoft.com/office/drawing/2014/main" id="{31180763-4446-1E34-088E-91C0898E7C57}"/>
               </a:ext>
             </a:extLst>
           </p:cNvPr>
@@ -4237,8 +4649,8 @@
         </p:blipFill>
         <p:spPr>
           <a:xfrm>
-            <a:off x="2525720" y="1428576"/>
-            <a:ext cx="7140559" cy="4000847"/>
+            <a:off x="781050" y="1151164"/>
+            <a:ext cx="10629900" cy="4555672"/>
           </a:xfrm>
           <a:prstGeom prst="rect">
             <a:avLst/>
@@ -4250,7 +4662,7 @@
           <p:cNvPr id="4" name="TextBox 3">
             <a:extLst>
               <a:ext uri="{FF2B5EF4-FFF2-40B4-BE49-F238E27FC236}">
-                <a16:creationId xmlns:a16="http://schemas.microsoft.com/office/drawing/2014/main" id="{B6583EB9-0B5D-8739-561A-E0452B03B7CA}"/>
+                <a16:creationId xmlns:a16="http://schemas.microsoft.com/office/drawing/2014/main" id="{05284242-EE64-3AE5-BE47-AD78FD3DA911}"/>
               </a:ext>
             </a:extLst>
           </p:cNvPr>
@@ -4259,7 +4671,7 @@
         </p:nvSpPr>
         <p:spPr>
           <a:xfrm>
-            <a:off x="2786326" y="1110021"/>
+            <a:off x="897014" y="773844"/>
             <a:ext cx="635299" cy="523220"/>
           </a:xfrm>
           <a:prstGeom prst="rect">
@@ -4285,7 +4697,7 @@
           <p:cNvPr id="5" name="TextBox 4">
             <a:extLst>
               <a:ext uri="{FF2B5EF4-FFF2-40B4-BE49-F238E27FC236}">
-                <a16:creationId xmlns:a16="http://schemas.microsoft.com/office/drawing/2014/main" id="{B89ACE98-C277-BB10-9A45-8552DAF71BCE}"/>
+                <a16:creationId xmlns:a16="http://schemas.microsoft.com/office/drawing/2014/main" id="{15C4985A-C71A-68BC-1563-F3737E08DA8D}"/>
               </a:ext>
             </a:extLst>
           </p:cNvPr>
@@ -4294,7 +4706,7 @@
         </p:nvSpPr>
         <p:spPr>
           <a:xfrm>
-            <a:off x="5668479" y="1110021"/>
+            <a:off x="5374885" y="773844"/>
             <a:ext cx="635299" cy="523220"/>
           </a:xfrm>
           <a:prstGeom prst="rect">
@@ -4318,7 +4730,7 @@
     </p:spTree>
     <p:extLst>
       <p:ext uri="{BB962C8B-B14F-4D97-AF65-F5344CB8AC3E}">
-        <p14:creationId xmlns:p14="http://schemas.microsoft.com/office/powerpoint/2010/main" val="3313120462"/>
+        <p14:creationId xmlns:p14="http://schemas.microsoft.com/office/powerpoint/2010/main" val="1703736076"/>
       </p:ext>
     </p:extLst>
   </p:cSld>
@@ -4350,7 +4762,7 @@
           <p:cNvPr id="3" name="Picture 2">
             <a:extLst>
               <a:ext uri="{FF2B5EF4-FFF2-40B4-BE49-F238E27FC236}">
-                <a16:creationId xmlns:a16="http://schemas.microsoft.com/office/drawing/2014/main" id="{50A739B5-7684-D847-660A-CBDA9C93B613}"/>
+                <a16:creationId xmlns:a16="http://schemas.microsoft.com/office/drawing/2014/main" id="{FE6B004D-D557-23B6-5E45-61416802EC4D}"/>
               </a:ext>
             </a:extLst>
           </p:cNvPr>
@@ -4373,8 +4785,8 @@
         </p:blipFill>
         <p:spPr>
           <a:xfrm>
-            <a:off x="804582" y="986807"/>
-            <a:ext cx="10582835" cy="4884385"/>
+            <a:off x="2525720" y="1428576"/>
+            <a:ext cx="7140559" cy="4000847"/>
           </a:xfrm>
           <a:prstGeom prst="rect">
             <a:avLst/>
@@ -4386,7 +4798,7 @@
           <p:cNvPr id="4" name="TextBox 3">
             <a:extLst>
               <a:ext uri="{FF2B5EF4-FFF2-40B4-BE49-F238E27FC236}">
-                <a16:creationId xmlns:a16="http://schemas.microsoft.com/office/drawing/2014/main" id="{86F488B7-6059-96C7-E286-62B4F2687766}"/>
+                <a16:creationId xmlns:a16="http://schemas.microsoft.com/office/drawing/2014/main" id="{B6583EB9-0B5D-8739-561A-E0452B03B7CA}"/>
               </a:ext>
             </a:extLst>
           </p:cNvPr>
@@ -4395,7 +4807,7 @@
         </p:nvSpPr>
         <p:spPr>
           <a:xfrm>
-            <a:off x="930632" y="612480"/>
+            <a:off x="2786326" y="1110021"/>
             <a:ext cx="635299" cy="523220"/>
           </a:xfrm>
           <a:prstGeom prst="rect">
@@ -4421,7 +4833,7 @@
           <p:cNvPr id="5" name="TextBox 4">
             <a:extLst>
               <a:ext uri="{FF2B5EF4-FFF2-40B4-BE49-F238E27FC236}">
-                <a16:creationId xmlns:a16="http://schemas.microsoft.com/office/drawing/2014/main" id="{AF29E055-D837-59B0-8848-1EE3E1EBBF24}"/>
+                <a16:creationId xmlns:a16="http://schemas.microsoft.com/office/drawing/2014/main" id="{B89ACE98-C277-BB10-9A45-8552DAF71BCE}"/>
               </a:ext>
             </a:extLst>
           </p:cNvPr>
@@ -4430,7 +4842,7 @@
         </p:nvSpPr>
         <p:spPr>
           <a:xfrm>
-            <a:off x="5187618" y="612480"/>
+            <a:off x="5668479" y="1110021"/>
             <a:ext cx="635299" cy="523220"/>
           </a:xfrm>
           <a:prstGeom prst="rect">
@@ -4447,6 +4859,207 @@
             <a:r>
               <a:rPr lang="nl-NL" sz="2800" b="1" dirty="0"/>
               <a:t>B.</a:t>
+            </a:r>
+          </a:p>
+        </p:txBody>
+      </p:sp>
+    </p:spTree>
+    <p:extLst>
+      <p:ext uri="{BB962C8B-B14F-4D97-AF65-F5344CB8AC3E}">
+        <p14:creationId xmlns:p14="http://schemas.microsoft.com/office/powerpoint/2010/main" val="3313120462"/>
+      </p:ext>
+    </p:extLst>
+  </p:cSld>
+  <p:clrMapOvr>
+    <a:masterClrMapping/>
+  </p:clrMapOvr>
+</p:sld>
+</file>
+
+<file path=ppt/slides/slide9.xml><?xml version="1.0" encoding="utf-8"?>
+<p:sld xmlns:a="http://schemas.openxmlformats.org/drawingml/2006/main" xmlns:r="http://schemas.openxmlformats.org/officeDocument/2006/relationships" xmlns:p="http://schemas.openxmlformats.org/presentationml/2006/main">
+  <p:cSld>
+    <p:spTree>
+      <p:nvGrpSpPr>
+        <p:cNvPr id="1" name=""/>
+        <p:cNvGrpSpPr/>
+        <p:nvPr/>
+      </p:nvGrpSpPr>
+      <p:grpSpPr>
+        <a:xfrm>
+          <a:off x="0" y="0"/>
+          <a:ext cx="0" cy="0"/>
+          <a:chOff x="0" y="0"/>
+          <a:chExt cx="0" cy="0"/>
+        </a:xfrm>
+      </p:grpSpPr>
+      <p:pic>
+        <p:nvPicPr>
+          <p:cNvPr id="3" name="Picture 2">
+            <a:extLst>
+              <a:ext uri="{FF2B5EF4-FFF2-40B4-BE49-F238E27FC236}">
+                <a16:creationId xmlns:a16="http://schemas.microsoft.com/office/drawing/2014/main" id="{50A739B5-7684-D847-660A-CBDA9C93B613}"/>
+              </a:ext>
+            </a:extLst>
+          </p:cNvPr>
+          <p:cNvPicPr>
+            <a:picLocks noChangeAspect="1"/>
+          </p:cNvPicPr>
+          <p:nvPr/>
+        </p:nvPicPr>
+        <p:blipFill>
+          <a:blip r:embed="rId2">
+            <a:extLst>
+              <a:ext uri="{28A0092B-C50C-407E-A947-70E740481C1C}">
+                <a14:useLocalDpi xmlns:a14="http://schemas.microsoft.com/office/drawing/2010/main" val="0"/>
+              </a:ext>
+            </a:extLst>
+          </a:blip>
+          <a:stretch>
+            <a:fillRect/>
+          </a:stretch>
+        </p:blipFill>
+        <p:spPr>
+          <a:xfrm>
+            <a:off x="804582" y="986807"/>
+            <a:ext cx="10582835" cy="4884385"/>
+          </a:xfrm>
+          <a:prstGeom prst="rect">
+            <a:avLst/>
+          </a:prstGeom>
+        </p:spPr>
+      </p:pic>
+      <p:sp>
+        <p:nvSpPr>
+          <p:cNvPr id="4" name="TextBox 3">
+            <a:extLst>
+              <a:ext uri="{FF2B5EF4-FFF2-40B4-BE49-F238E27FC236}">
+                <a16:creationId xmlns:a16="http://schemas.microsoft.com/office/drawing/2014/main" id="{86F488B7-6059-96C7-E286-62B4F2687766}"/>
+              </a:ext>
+            </a:extLst>
+          </p:cNvPr>
+          <p:cNvSpPr txBox="1"/>
+          <p:nvPr/>
+        </p:nvSpPr>
+        <p:spPr>
+          <a:xfrm>
+            <a:off x="930632" y="612480"/>
+            <a:ext cx="635299" cy="523220"/>
+          </a:xfrm>
+          <a:prstGeom prst="rect">
+            <a:avLst/>
+          </a:prstGeom>
+          <a:noFill/>
+        </p:spPr>
+        <p:txBody>
+          <a:bodyPr wrap="square" rtlCol="0">
+            <a:spAutoFit/>
+          </a:bodyPr>
+          <a:lstStyle/>
+          <a:p>
+            <a:r>
+              <a:rPr lang="nl-NL" sz="2800" b="1" dirty="0"/>
+              <a:t>A.</a:t>
+            </a:r>
+          </a:p>
+        </p:txBody>
+      </p:sp>
+      <p:sp>
+        <p:nvSpPr>
+          <p:cNvPr id="5" name="TextBox 4">
+            <a:extLst>
+              <a:ext uri="{FF2B5EF4-FFF2-40B4-BE49-F238E27FC236}">
+                <a16:creationId xmlns:a16="http://schemas.microsoft.com/office/drawing/2014/main" id="{AF29E055-D837-59B0-8848-1EE3E1EBBF24}"/>
+              </a:ext>
+            </a:extLst>
+          </p:cNvPr>
+          <p:cNvSpPr txBox="1"/>
+          <p:nvPr/>
+        </p:nvSpPr>
+        <p:spPr>
+          <a:xfrm>
+            <a:off x="5187618" y="612480"/>
+            <a:ext cx="635299" cy="523220"/>
+          </a:xfrm>
+          <a:prstGeom prst="rect">
+            <a:avLst/>
+          </a:prstGeom>
+          <a:noFill/>
+        </p:spPr>
+        <p:txBody>
+          <a:bodyPr wrap="square" rtlCol="0">
+            <a:spAutoFit/>
+          </a:bodyPr>
+          <a:lstStyle/>
+          <a:p>
+            <a:r>
+              <a:rPr lang="nl-NL" sz="2800" b="1" dirty="0"/>
+              <a:t>B.</a:t>
+            </a:r>
+          </a:p>
+        </p:txBody>
+      </p:sp>
+      <p:pic>
+        <p:nvPicPr>
+          <p:cNvPr id="6" name="Picture 5">
+            <a:extLst>
+              <a:ext uri="{FF2B5EF4-FFF2-40B4-BE49-F238E27FC236}">
+                <a16:creationId xmlns:a16="http://schemas.microsoft.com/office/drawing/2014/main" id="{1DF52ED6-E2CB-8017-C42E-65373E51B586}"/>
+              </a:ext>
+            </a:extLst>
+          </p:cNvPr>
+          <p:cNvPicPr>
+            <a:picLocks noChangeAspect="1"/>
+          </p:cNvPicPr>
+          <p:nvPr/>
+        </p:nvPicPr>
+        <p:blipFill>
+          <a:blip r:embed="rId3"/>
+          <a:stretch>
+            <a:fillRect/>
+          </a:stretch>
+        </p:blipFill>
+        <p:spPr>
+          <a:xfrm>
+            <a:off x="4654028" y="2961921"/>
+            <a:ext cx="112954" cy="396274"/>
+          </a:xfrm>
+          <a:prstGeom prst="rect">
+            <a:avLst/>
+          </a:prstGeom>
+        </p:spPr>
+      </p:pic>
+      <p:sp>
+        <p:nvSpPr>
+          <p:cNvPr id="7" name="TextBox 6">
+            <a:extLst>
+              <a:ext uri="{FF2B5EF4-FFF2-40B4-BE49-F238E27FC236}">
+                <a16:creationId xmlns:a16="http://schemas.microsoft.com/office/drawing/2014/main" id="{59DCBCD0-3F78-C2BC-1AE9-149FCA55FF0A}"/>
+              </a:ext>
+            </a:extLst>
+          </p:cNvPr>
+          <p:cNvSpPr txBox="1"/>
+          <p:nvPr/>
+        </p:nvSpPr>
+        <p:spPr>
+          <a:xfrm>
+            <a:off x="4586121" y="3189502"/>
+            <a:ext cx="289112" cy="246221"/>
+          </a:xfrm>
+          <a:prstGeom prst="rect">
+            <a:avLst/>
+          </a:prstGeom>
+          <a:noFill/>
+        </p:spPr>
+        <p:txBody>
+          <a:bodyPr wrap="square" rtlCol="0">
+            <a:spAutoFit/>
+          </a:bodyPr>
+          <a:lstStyle/>
+          <a:p>
+            <a:r>
+              <a:rPr lang="nl-NL" sz="1000" b="1" dirty="0"/>
+              <a:t>&gt;</a:t>
             </a:r>
           </a:p>
         </p:txBody>
